--- a/instructors/L9-ResponsibleComputing.pptx
+++ b/instructors/L9-ResponsibleComputing.pptx
@@ -5,7 +5,7 @@
     <p:sldMasterId id="2147483648" r:id="rId1"/>
   </p:sldMasterIdLst>
   <p:notesMasterIdLst>
-    <p:notesMasterId r:id="rId28"/>
+    <p:notesMasterId r:id="rId32"/>
   </p:notesMasterIdLst>
   <p:sldIdLst>
     <p:sldId id="256" r:id="rId2"/>
@@ -15,25 +15,29 @@
     <p:sldId id="1705" r:id="rId6"/>
     <p:sldId id="1704" r:id="rId7"/>
     <p:sldId id="1706" r:id="rId8"/>
-    <p:sldId id="1707" r:id="rId9"/>
-    <p:sldId id="1711" r:id="rId10"/>
-    <p:sldId id="1723" r:id="rId11"/>
-    <p:sldId id="1724" r:id="rId12"/>
-    <p:sldId id="1727" r:id="rId13"/>
-    <p:sldId id="1736" r:id="rId14"/>
-    <p:sldId id="1714" r:id="rId15"/>
-    <p:sldId id="1720" r:id="rId16"/>
-    <p:sldId id="1729" r:id="rId17"/>
-    <p:sldId id="1737" r:id="rId18"/>
-    <p:sldId id="1709" r:id="rId19"/>
-    <p:sldId id="1730" r:id="rId20"/>
-    <p:sldId id="1710" r:id="rId21"/>
-    <p:sldId id="1721" r:id="rId22"/>
-    <p:sldId id="1712" r:id="rId23"/>
-    <p:sldId id="1713" r:id="rId24"/>
-    <p:sldId id="1732" r:id="rId25"/>
-    <p:sldId id="1738" r:id="rId26"/>
-    <p:sldId id="1702" r:id="rId27"/>
+    <p:sldId id="1739" r:id="rId9"/>
+    <p:sldId id="1707" r:id="rId10"/>
+    <p:sldId id="1711" r:id="rId11"/>
+    <p:sldId id="1723" r:id="rId12"/>
+    <p:sldId id="1724" r:id="rId13"/>
+    <p:sldId id="1727" r:id="rId14"/>
+    <p:sldId id="1736" r:id="rId15"/>
+    <p:sldId id="1740" r:id="rId16"/>
+    <p:sldId id="1714" r:id="rId17"/>
+    <p:sldId id="1720" r:id="rId18"/>
+    <p:sldId id="1729" r:id="rId19"/>
+    <p:sldId id="1737" r:id="rId20"/>
+    <p:sldId id="1741" r:id="rId21"/>
+    <p:sldId id="1709" r:id="rId22"/>
+    <p:sldId id="1730" r:id="rId23"/>
+    <p:sldId id="1710" r:id="rId24"/>
+    <p:sldId id="1721" r:id="rId25"/>
+    <p:sldId id="1712" r:id="rId26"/>
+    <p:sldId id="1713" r:id="rId27"/>
+    <p:sldId id="1732" r:id="rId28"/>
+    <p:sldId id="1738" r:id="rId29"/>
+    <p:sldId id="1742" r:id="rId30"/>
+    <p:sldId id="1702" r:id="rId31"/>
   </p:sldIdLst>
   <p:sldSz cx="12192000" cy="6858000"/>
   <p:notesSz cx="6858000" cy="9144000"/>
@@ -143,7 +147,7 @@
 <file path=ppt/revisionInfo.xml><?xml version="1.0" encoding="utf-8"?>
 <p1510:revInfo xmlns:a="http://schemas.openxmlformats.org/drawingml/2006/main" xmlns:r="http://schemas.openxmlformats.org/officeDocument/2006/relationships" xmlns:p1510="http://schemas.microsoft.com/office/powerpoint/2015/10/main">
   <p1510:revLst>
-    <p1510:client id="{D1420D6B-0451-4F4A-BF62-0F94A01A06C8}" v="679" dt="2026-06-18T07:53:07.733"/>
+    <p1510:client id="{8F3E5F1F-9CD8-2D42-8BBD-916AF61C1CA9}" v="5" dt="2026-10-01T19:39:52.436"/>
   </p1510:revLst>
 </p1510:revInfo>
 </file>
@@ -153,399 +157,18 @@
   <pc:docChgLst>
     <pc:chgData name="Andrew Turner" userId="9b60647a-c825-4266-aafa-670849c64782" providerId="ADAL" clId="{292526B5-234E-5EAA-AFB8-0412B8CA4453}"/>
     <pc:docChg chg="undo custSel addSld delSld modSld sldOrd">
-      <pc:chgData name="Andrew Turner" userId="9b60647a-c825-4266-aafa-670849c64782" providerId="ADAL" clId="{292526B5-234E-5EAA-AFB8-0412B8CA4453}" dt="2026-06-18T07:56:56.961" v="15529" actId="20577"/>
+      <pc:chgData name="Andrew Turner" userId="9b60647a-c825-4266-aafa-670849c64782" providerId="ADAL" clId="{292526B5-234E-5EAA-AFB8-0412B8CA4453}" dt="2026-10-01T19:45:33.424" v="15827" actId="207"/>
       <pc:docMkLst>
         <pc:docMk/>
       </pc:docMkLst>
-      <pc:sldChg chg="addSp delSp modSp mod">
-        <pc:chgData name="Andrew Turner" userId="9b60647a-c825-4266-aafa-670849c64782" providerId="ADAL" clId="{292526B5-234E-5EAA-AFB8-0412B8CA4453}" dt="2026-06-18T07:56:56.961" v="15529" actId="20577"/>
-        <pc:sldMkLst>
-          <pc:docMk/>
-          <pc:sldMk cId="3551035755" sldId="256"/>
-        </pc:sldMkLst>
-        <pc:spChg chg="mod">
-          <ac:chgData name="Andrew Turner" userId="9b60647a-c825-4266-aafa-670849c64782" providerId="ADAL" clId="{292526B5-234E-5EAA-AFB8-0412B8CA4453}" dt="2026-06-18T07:56:56.961" v="15529" actId="20577"/>
-          <ac:spMkLst>
-            <pc:docMk/>
-            <pc:sldMk cId="3551035755" sldId="256"/>
-            <ac:spMk id="2" creationId="{662C71DA-7F2A-A8EC-3829-5ECA4E32E910}"/>
-          </ac:spMkLst>
-        </pc:spChg>
-        <pc:spChg chg="mod">
-          <ac:chgData name="Andrew Turner" userId="9b60647a-c825-4266-aafa-670849c64782" providerId="ADAL" clId="{292526B5-234E-5EAA-AFB8-0412B8CA4453}" dt="2026-06-08T09:34:42.098" v="3487" actId="20577"/>
-          <ac:spMkLst>
-            <pc:docMk/>
-            <pc:sldMk cId="3551035755" sldId="256"/>
-            <ac:spMk id="3" creationId="{D954F7DC-26EE-43DF-D4E0-28174E9A1FFF}"/>
-          </ac:spMkLst>
-        </pc:spChg>
-      </pc:sldChg>
-      <pc:sldChg chg="add">
-        <pc:chgData name="Andrew Turner" userId="9b60647a-c825-4266-aafa-670849c64782" providerId="ADAL" clId="{292526B5-234E-5EAA-AFB8-0412B8CA4453}" dt="2026-06-18T07:48:29.433" v="15398"/>
-        <pc:sldMkLst>
-          <pc:docMk/>
-          <pc:sldMk cId="3369251669" sldId="257"/>
-        </pc:sldMkLst>
-      </pc:sldChg>
-      <pc:sldChg chg="modSp add mod">
-        <pc:chgData name="Andrew Turner" userId="9b60647a-c825-4266-aafa-670849c64782" providerId="ADAL" clId="{292526B5-234E-5EAA-AFB8-0412B8CA4453}" dt="2026-06-09T13:47:16.559" v="10712" actId="20577"/>
-        <pc:sldMkLst>
-          <pc:docMk/>
-          <pc:sldMk cId="2304510356" sldId="258"/>
-        </pc:sldMkLst>
-        <pc:spChg chg="mod">
-          <ac:chgData name="Andrew Turner" userId="9b60647a-c825-4266-aafa-670849c64782" providerId="ADAL" clId="{292526B5-234E-5EAA-AFB8-0412B8CA4453}" dt="2026-06-09T13:47:16.559" v="10712" actId="20577"/>
-          <ac:spMkLst>
-            <pc:docMk/>
-            <pc:sldMk cId="2304510356" sldId="258"/>
-            <ac:spMk id="3" creationId="{864EF2CE-99FF-B9E6-3BA6-EEE643735DB1}"/>
-          </ac:spMkLst>
-        </pc:spChg>
-      </pc:sldChg>
-      <pc:sldChg chg="addSp delSp modSp add mod">
-        <pc:chgData name="Andrew Turner" userId="9b60647a-c825-4266-aafa-670849c64782" providerId="ADAL" clId="{292526B5-234E-5EAA-AFB8-0412B8CA4453}" dt="2026-06-12T08:12:37.168" v="11906" actId="1037"/>
-        <pc:sldMkLst>
-          <pc:docMk/>
-          <pc:sldMk cId="2510383598" sldId="259"/>
-        </pc:sldMkLst>
-        <pc:spChg chg="mod">
-          <ac:chgData name="Andrew Turner" userId="9b60647a-c825-4266-aafa-670849c64782" providerId="ADAL" clId="{292526B5-234E-5EAA-AFB8-0412B8CA4453}" dt="2026-06-09T14:53:59.037" v="11459" actId="1076"/>
-          <ac:spMkLst>
-            <pc:docMk/>
-            <pc:sldMk cId="2510383598" sldId="259"/>
-            <ac:spMk id="4" creationId="{F79472E0-0ABC-8DCD-BDE2-10775DF523EA}"/>
-          </ac:spMkLst>
-        </pc:spChg>
-        <pc:spChg chg="mod">
-          <ac:chgData name="Andrew Turner" userId="9b60647a-c825-4266-aafa-670849c64782" providerId="ADAL" clId="{292526B5-234E-5EAA-AFB8-0412B8CA4453}" dt="2026-06-12T08:10:45.958" v="11886" actId="13822"/>
-          <ac:spMkLst>
-            <pc:docMk/>
-            <pc:sldMk cId="2510383598" sldId="259"/>
-            <ac:spMk id="5" creationId="{29BDF644-C38B-C1C8-C235-10E245064D93}"/>
-          </ac:spMkLst>
-        </pc:spChg>
-        <pc:spChg chg="mod">
-          <ac:chgData name="Andrew Turner" userId="9b60647a-c825-4266-aafa-670849c64782" providerId="ADAL" clId="{292526B5-234E-5EAA-AFB8-0412B8CA4453}" dt="2026-06-12T08:12:08.693" v="11900" actId="14100"/>
-          <ac:spMkLst>
-            <pc:docMk/>
-            <pc:sldMk cId="2510383598" sldId="259"/>
-            <ac:spMk id="6" creationId="{3BB8D096-77CB-CFDF-E7FC-D78FC3CF5B91}"/>
-          </ac:spMkLst>
-        </pc:spChg>
-        <pc:spChg chg="add mod">
-          <ac:chgData name="Andrew Turner" userId="9b60647a-c825-4266-aafa-670849c64782" providerId="ADAL" clId="{292526B5-234E-5EAA-AFB8-0412B8CA4453}" dt="2026-06-12T08:11:34.187" v="11894" actId="1038"/>
-          <ac:spMkLst>
-            <pc:docMk/>
-            <pc:sldMk cId="2510383598" sldId="259"/>
-            <ac:spMk id="7" creationId="{A2FCEB62-0C72-7949-879D-67745BF6D46F}"/>
-          </ac:spMkLst>
-        </pc:spChg>
-        <pc:spChg chg="add mod">
-          <ac:chgData name="Andrew Turner" userId="9b60647a-c825-4266-aafa-670849c64782" providerId="ADAL" clId="{292526B5-234E-5EAA-AFB8-0412B8CA4453}" dt="2026-06-12T08:08:20.459" v="11879" actId="14100"/>
-          <ac:spMkLst>
-            <pc:docMk/>
-            <pc:sldMk cId="2510383598" sldId="259"/>
-            <ac:spMk id="8" creationId="{A92BCFDE-9E94-BE4A-6380-2305B534492A}"/>
-          </ac:spMkLst>
-        </pc:spChg>
-        <pc:cxnChg chg="add mod">
-          <ac:chgData name="Andrew Turner" userId="9b60647a-c825-4266-aafa-670849c64782" providerId="ADAL" clId="{292526B5-234E-5EAA-AFB8-0412B8CA4453}" dt="2026-06-12T08:12:37.168" v="11906" actId="1037"/>
-          <ac:cxnSpMkLst>
-            <pc:docMk/>
-            <pc:sldMk cId="2510383598" sldId="259"/>
-            <ac:cxnSpMk id="12" creationId="{409B176F-AEFC-A204-7DFD-A82E1EB69190}"/>
-          </ac:cxnSpMkLst>
-        </pc:cxnChg>
-        <pc:cxnChg chg="add mod">
-          <ac:chgData name="Andrew Turner" userId="9b60647a-c825-4266-aafa-670849c64782" providerId="ADAL" clId="{292526B5-234E-5EAA-AFB8-0412B8CA4453}" dt="2026-06-12T08:12:33.010" v="11905" actId="1038"/>
-          <ac:cxnSpMkLst>
-            <pc:docMk/>
-            <pc:sldMk cId="2510383598" sldId="259"/>
-            <ac:cxnSpMk id="18" creationId="{DD2492C2-8F3C-137F-7261-47EF8575C899}"/>
-          </ac:cxnSpMkLst>
-        </pc:cxnChg>
-      </pc:sldChg>
-      <pc:sldChg chg="modSp add mod">
-        <pc:chgData name="Andrew Turner" userId="9b60647a-c825-4266-aafa-670849c64782" providerId="ADAL" clId="{292526B5-234E-5EAA-AFB8-0412B8CA4453}" dt="2026-06-09T13:50:29.168" v="10830" actId="20577"/>
-        <pc:sldMkLst>
-          <pc:docMk/>
-          <pc:sldMk cId="2545372616" sldId="260"/>
-        </pc:sldMkLst>
-        <pc:spChg chg="mod">
-          <ac:chgData name="Andrew Turner" userId="9b60647a-c825-4266-aafa-670849c64782" providerId="ADAL" clId="{292526B5-234E-5EAA-AFB8-0412B8CA4453}" dt="2026-06-09T13:50:29.168" v="10830" actId="20577"/>
-          <ac:spMkLst>
-            <pc:docMk/>
-            <pc:sldMk cId="2545372616" sldId="260"/>
-            <ac:spMk id="3" creationId="{C1527823-A9BD-2785-6A61-B8C9CBD5C9F6}"/>
-          </ac:spMkLst>
-        </pc:spChg>
-      </pc:sldChg>
-      <pc:sldChg chg="add">
-        <pc:chgData name="Andrew Turner" userId="9b60647a-c825-4266-aafa-670849c64782" providerId="ADAL" clId="{292526B5-234E-5EAA-AFB8-0412B8CA4453}" dt="2026-06-09T13:45:45.504" v="10517"/>
-        <pc:sldMkLst>
-          <pc:docMk/>
-          <pc:sldMk cId="3054602111" sldId="261"/>
-        </pc:sldMkLst>
-      </pc:sldChg>
-      <pc:sldChg chg="modSp mod">
-        <pc:chgData name="Andrew Turner" userId="9b60647a-c825-4266-aafa-670849c64782" providerId="ADAL" clId="{292526B5-234E-5EAA-AFB8-0412B8CA4453}" dt="2026-06-16T18:39:40.166" v="14612" actId="20577"/>
-        <pc:sldMkLst>
-          <pc:docMk/>
-          <pc:sldMk cId="2041110984" sldId="263"/>
-        </pc:sldMkLst>
-        <pc:spChg chg="mod">
-          <ac:chgData name="Andrew Turner" userId="9b60647a-c825-4266-aafa-670849c64782" providerId="ADAL" clId="{292526B5-234E-5EAA-AFB8-0412B8CA4453}" dt="2026-06-09T14:52:02.601" v="11279" actId="20577"/>
-          <ac:spMkLst>
-            <pc:docMk/>
-            <pc:sldMk cId="2041110984" sldId="263"/>
-            <ac:spMk id="2" creationId="{2672F6FE-644B-1FAD-DA53-833D89175A58}"/>
-          </ac:spMkLst>
-        </pc:spChg>
-        <pc:spChg chg="mod">
-          <ac:chgData name="Andrew Turner" userId="9b60647a-c825-4266-aafa-670849c64782" providerId="ADAL" clId="{292526B5-234E-5EAA-AFB8-0412B8CA4453}" dt="2026-06-16T18:39:40.166" v="14612" actId="20577"/>
-          <ac:spMkLst>
-            <pc:docMk/>
-            <pc:sldMk cId="2041110984" sldId="263"/>
-            <ac:spMk id="3" creationId="{8F6636AD-81A8-24BB-0001-488C35956831}"/>
-          </ac:spMkLst>
-        </pc:spChg>
-      </pc:sldChg>
-      <pc:sldChg chg="modSp add mod">
-        <pc:chgData name="Andrew Turner" userId="9b60647a-c825-4266-aafa-670849c64782" providerId="ADAL" clId="{292526B5-234E-5EAA-AFB8-0412B8CA4453}" dt="2026-06-18T07:48:56.771" v="15438" actId="20577"/>
-        <pc:sldMkLst>
-          <pc:docMk/>
-          <pc:sldMk cId="3584819089" sldId="264"/>
-        </pc:sldMkLst>
-        <pc:spChg chg="mod">
-          <ac:chgData name="Andrew Turner" userId="9b60647a-c825-4266-aafa-670849c64782" providerId="ADAL" clId="{292526B5-234E-5EAA-AFB8-0412B8CA4453}" dt="2026-06-18T07:48:56.771" v="15438" actId="20577"/>
-          <ac:spMkLst>
-            <pc:docMk/>
-            <pc:sldMk cId="3584819089" sldId="264"/>
-            <ac:spMk id="2" creationId="{6F82E27A-6DFB-3546-F0B8-5A1C058286A0}"/>
-          </ac:spMkLst>
-        </pc:spChg>
-      </pc:sldChg>
-      <pc:sldChg chg="add">
-        <pc:chgData name="Andrew Turner" userId="9b60647a-c825-4266-aafa-670849c64782" providerId="ADAL" clId="{292526B5-234E-5EAA-AFB8-0412B8CA4453}" dt="2026-06-18T07:48:29.433" v="15398"/>
-        <pc:sldMkLst>
-          <pc:docMk/>
-          <pc:sldMk cId="763717740" sldId="265"/>
-        </pc:sldMkLst>
-      </pc:sldChg>
-      <pc:sldChg chg="add">
-        <pc:chgData name="Andrew Turner" userId="9b60647a-c825-4266-aafa-670849c64782" providerId="ADAL" clId="{292526B5-234E-5EAA-AFB8-0412B8CA4453}" dt="2026-06-18T07:48:29.433" v="15398"/>
-        <pc:sldMkLst>
-          <pc:docMk/>
-          <pc:sldMk cId="1254716831" sldId="267"/>
-        </pc:sldMkLst>
-      </pc:sldChg>
-      <pc:sldChg chg="add">
-        <pc:chgData name="Andrew Turner" userId="9b60647a-c825-4266-aafa-670849c64782" providerId="ADAL" clId="{292526B5-234E-5EAA-AFB8-0412B8CA4453}" dt="2026-06-18T07:48:29.433" v="15398"/>
-        <pc:sldMkLst>
-          <pc:docMk/>
-          <pc:sldMk cId="3766210556" sldId="268"/>
-        </pc:sldMkLst>
-      </pc:sldChg>
-      <pc:sldChg chg="add">
-        <pc:chgData name="Andrew Turner" userId="9b60647a-c825-4266-aafa-670849c64782" providerId="ADAL" clId="{292526B5-234E-5EAA-AFB8-0412B8CA4453}" dt="2026-06-18T07:48:29.433" v="15398"/>
-        <pc:sldMkLst>
-          <pc:docMk/>
-          <pc:sldMk cId="646229825" sldId="269"/>
-        </pc:sldMkLst>
-      </pc:sldChg>
-      <pc:sldChg chg="add del">
-        <pc:chgData name="Andrew Turner" userId="9b60647a-c825-4266-aafa-670849c64782" providerId="ADAL" clId="{292526B5-234E-5EAA-AFB8-0412B8CA4453}" dt="2026-06-18T07:51:16.277" v="15443" actId="2696"/>
-        <pc:sldMkLst>
-          <pc:docMk/>
-          <pc:sldMk cId="3532735985" sldId="270"/>
-        </pc:sldMkLst>
-      </pc:sldChg>
-      <pc:sldChg chg="add del">
-        <pc:chgData name="Andrew Turner" userId="9b60647a-c825-4266-aafa-670849c64782" providerId="ADAL" clId="{292526B5-234E-5EAA-AFB8-0412B8CA4453}" dt="2026-06-18T07:51:16.876" v="15444" actId="2696"/>
-        <pc:sldMkLst>
-          <pc:docMk/>
-          <pc:sldMk cId="1341082237" sldId="273"/>
-        </pc:sldMkLst>
-      </pc:sldChg>
-      <pc:sldChg chg="add del">
-        <pc:chgData name="Andrew Turner" userId="9b60647a-c825-4266-aafa-670849c64782" providerId="ADAL" clId="{292526B5-234E-5EAA-AFB8-0412B8CA4453}" dt="2026-06-18T07:51:19.291" v="15445" actId="2696"/>
-        <pc:sldMkLst>
-          <pc:docMk/>
-          <pc:sldMk cId="3613063635" sldId="274"/>
-        </pc:sldMkLst>
-      </pc:sldChg>
-      <pc:sldChg chg="add del">
-        <pc:chgData name="Andrew Turner" userId="9b60647a-c825-4266-aafa-670849c64782" providerId="ADAL" clId="{292526B5-234E-5EAA-AFB8-0412B8CA4453}" dt="2026-06-18T07:51:09.077" v="15442" actId="2696"/>
-        <pc:sldMkLst>
-          <pc:docMk/>
-          <pc:sldMk cId="538548223" sldId="275"/>
-        </pc:sldMkLst>
-      </pc:sldChg>
-      <pc:sldChg chg="modSp add mod">
-        <pc:chgData name="Andrew Turner" userId="9b60647a-c825-4266-aafa-670849c64782" providerId="ADAL" clId="{292526B5-234E-5EAA-AFB8-0412B8CA4453}" dt="2026-06-18T07:51:52.806" v="15470" actId="20577"/>
-        <pc:sldMkLst>
-          <pc:docMk/>
-          <pc:sldMk cId="2278441967" sldId="276"/>
-        </pc:sldMkLst>
-        <pc:spChg chg="mod">
-          <ac:chgData name="Andrew Turner" userId="9b60647a-c825-4266-aafa-670849c64782" providerId="ADAL" clId="{292526B5-234E-5EAA-AFB8-0412B8CA4453}" dt="2026-06-18T07:51:52.806" v="15470" actId="20577"/>
-          <ac:spMkLst>
-            <pc:docMk/>
-            <pc:sldMk cId="2278441967" sldId="276"/>
-            <ac:spMk id="2" creationId="{1E85B0E5-A0BA-9945-598E-9230CA112A20}"/>
-          </ac:spMkLst>
-        </pc:spChg>
-      </pc:sldChg>
-      <pc:sldChg chg="modSp add mod">
-        <pc:chgData name="Andrew Turner" userId="9b60647a-c825-4266-aafa-670849c64782" providerId="ADAL" clId="{292526B5-234E-5EAA-AFB8-0412B8CA4453}" dt="2026-06-18T07:52:24.139" v="15487" actId="20577"/>
-        <pc:sldMkLst>
-          <pc:docMk/>
-          <pc:sldMk cId="1181395689" sldId="287"/>
-        </pc:sldMkLst>
-        <pc:spChg chg="mod">
-          <ac:chgData name="Andrew Turner" userId="9b60647a-c825-4266-aafa-670849c64782" providerId="ADAL" clId="{292526B5-234E-5EAA-AFB8-0412B8CA4453}" dt="2026-06-18T07:52:24.139" v="15487" actId="20577"/>
-          <ac:spMkLst>
-            <pc:docMk/>
-            <pc:sldMk cId="1181395689" sldId="287"/>
-            <ac:spMk id="2" creationId="{6F960AC3-C508-CC37-E197-FE1215A22F0B}"/>
-          </ac:spMkLst>
-        </pc:spChg>
-      </pc:sldChg>
-      <pc:sldChg chg="modSp add mod">
-        <pc:chgData name="Andrew Turner" userId="9b60647a-c825-4266-aafa-670849c64782" providerId="ADAL" clId="{292526B5-234E-5EAA-AFB8-0412B8CA4453}" dt="2026-06-18T07:52:40.863" v="15507" actId="20577"/>
-        <pc:sldMkLst>
-          <pc:docMk/>
-          <pc:sldMk cId="1965393384" sldId="293"/>
-        </pc:sldMkLst>
-        <pc:spChg chg="mod">
-          <ac:chgData name="Andrew Turner" userId="9b60647a-c825-4266-aafa-670849c64782" providerId="ADAL" clId="{292526B5-234E-5EAA-AFB8-0412B8CA4453}" dt="2026-06-18T07:52:40.863" v="15507" actId="20577"/>
-          <ac:spMkLst>
-            <pc:docMk/>
-            <pc:sldMk cId="1965393384" sldId="293"/>
-            <ac:spMk id="2" creationId="{6F960AC3-C508-CC37-E197-FE1215A22F0B}"/>
-          </ac:spMkLst>
-        </pc:spChg>
-      </pc:sldChg>
-      <pc:sldChg chg="add">
-        <pc:chgData name="Andrew Turner" userId="9b60647a-c825-4266-aafa-670849c64782" providerId="ADAL" clId="{292526B5-234E-5EAA-AFB8-0412B8CA4453}" dt="2026-06-08T09:08:38.601" v="1753"/>
-        <pc:sldMkLst>
-          <pc:docMk/>
-          <pc:sldMk cId="1551554438" sldId="304"/>
-        </pc:sldMkLst>
-      </pc:sldChg>
-      <pc:sldChg chg="modSp mod">
-        <pc:chgData name="Andrew Turner" userId="9b60647a-c825-4266-aafa-670849c64782" providerId="ADAL" clId="{292526B5-234E-5EAA-AFB8-0412B8CA4453}" dt="2026-06-15T10:41:24.058" v="11909" actId="14100"/>
-        <pc:sldMkLst>
-          <pc:docMk/>
-          <pc:sldMk cId="1332744819" sldId="1662"/>
-        </pc:sldMkLst>
-        <pc:spChg chg="mod">
-          <ac:chgData name="Andrew Turner" userId="9b60647a-c825-4266-aafa-670849c64782" providerId="ADAL" clId="{292526B5-234E-5EAA-AFB8-0412B8CA4453}" dt="2026-06-08T08:03:39.500" v="0" actId="14100"/>
-          <ac:spMkLst>
-            <pc:docMk/>
-            <pc:sldMk cId="1332744819" sldId="1662"/>
-            <ac:spMk id="2" creationId="{44640606-FF4D-94A3-0FD8-965FD9218B24}"/>
-          </ac:spMkLst>
-        </pc:spChg>
-        <pc:spChg chg="mod">
-          <ac:chgData name="Andrew Turner" userId="9b60647a-c825-4266-aafa-670849c64782" providerId="ADAL" clId="{292526B5-234E-5EAA-AFB8-0412B8CA4453}" dt="2026-06-15T10:41:24.058" v="11909" actId="14100"/>
-          <ac:spMkLst>
-            <pc:docMk/>
-            <pc:sldMk cId="1332744819" sldId="1662"/>
-            <ac:spMk id="3" creationId="{B28162B9-9F2A-E76E-3563-0DEAB97820C1}"/>
-          </ac:spMkLst>
-        </pc:spChg>
-      </pc:sldChg>
-      <pc:sldChg chg="modSp add mod">
-        <pc:chgData name="Andrew Turner" userId="9b60647a-c825-4266-aafa-670849c64782" providerId="ADAL" clId="{292526B5-234E-5EAA-AFB8-0412B8CA4453}" dt="2026-06-08T08:27:55.882" v="1295" actId="20577"/>
-        <pc:sldMkLst>
-          <pc:docMk/>
-          <pc:sldMk cId="1611218844" sldId="1664"/>
-        </pc:sldMkLst>
-        <pc:spChg chg="mod">
-          <ac:chgData name="Andrew Turner" userId="9b60647a-c825-4266-aafa-670849c64782" providerId="ADAL" clId="{292526B5-234E-5EAA-AFB8-0412B8CA4453}" dt="2026-06-08T08:27:55.882" v="1295" actId="20577"/>
-          <ac:spMkLst>
-            <pc:docMk/>
-            <pc:sldMk cId="1611218844" sldId="1664"/>
-            <ac:spMk id="2" creationId="{9A2F2E65-6E77-5CB3-8269-BF8E61E60042}"/>
-          </ac:spMkLst>
-        </pc:spChg>
-      </pc:sldChg>
-      <pc:sldChg chg="add">
-        <pc:chgData name="Andrew Turner" userId="9b60647a-c825-4266-aafa-670849c64782" providerId="ADAL" clId="{292526B5-234E-5EAA-AFB8-0412B8CA4453}" dt="2026-06-08T08:26:18.937" v="1203"/>
-        <pc:sldMkLst>
-          <pc:docMk/>
-          <pc:sldMk cId="1096360323" sldId="1684"/>
-        </pc:sldMkLst>
-      </pc:sldChg>
-      <pc:sldChg chg="ord">
-        <pc:chgData name="Andrew Turner" userId="9b60647a-c825-4266-aafa-670849c64782" providerId="ADAL" clId="{292526B5-234E-5EAA-AFB8-0412B8CA4453}" dt="2026-06-12T08:59:41.316" v="11907" actId="20578"/>
-        <pc:sldMkLst>
-          <pc:docMk/>
-          <pc:sldMk cId="295796368" sldId="1702"/>
-        </pc:sldMkLst>
-      </pc:sldChg>
-      <pc:sldChg chg="add">
-        <pc:chgData name="Andrew Turner" userId="9b60647a-c825-4266-aafa-670849c64782" providerId="ADAL" clId="{292526B5-234E-5EAA-AFB8-0412B8CA4453}" dt="2026-06-18T07:53:07.732" v="15508"/>
-        <pc:sldMkLst>
-          <pc:docMk/>
-          <pc:sldMk cId="2816786044" sldId="1703"/>
-        </pc:sldMkLst>
-      </pc:sldChg>
-      <pc:sldChg chg="addSp delSp modSp new mod">
-        <pc:chgData name="Andrew Turner" userId="9b60647a-c825-4266-aafa-670849c64782" providerId="ADAL" clId="{292526B5-234E-5EAA-AFB8-0412B8CA4453}" dt="2026-06-15T11:57:12.308" v="11988" actId="14100"/>
-        <pc:sldMkLst>
-          <pc:docMk/>
-          <pc:sldMk cId="3397942053" sldId="1704"/>
-        </pc:sldMkLst>
-        <pc:spChg chg="mod">
-          <ac:chgData name="Andrew Turner" userId="9b60647a-c825-4266-aafa-670849c64782" providerId="ADAL" clId="{292526B5-234E-5EAA-AFB8-0412B8CA4453}" dt="2026-06-08T08:05:05.613" v="100" actId="20577"/>
-          <ac:spMkLst>
-            <pc:docMk/>
-            <pc:sldMk cId="3397942053" sldId="1704"/>
-            <ac:spMk id="2" creationId="{D9D31743-385E-91B4-EB22-99185F5A15AF}"/>
-          </ac:spMkLst>
-        </pc:spChg>
-        <pc:spChg chg="add mod">
-          <ac:chgData name="Andrew Turner" userId="9b60647a-c825-4266-aafa-670849c64782" providerId="ADAL" clId="{292526B5-234E-5EAA-AFB8-0412B8CA4453}" dt="2026-06-15T11:53:34.617" v="11918" actId="14100"/>
-          <ac:spMkLst>
-            <pc:docMk/>
-            <pc:sldMk cId="3397942053" sldId="1704"/>
-            <ac:spMk id="4" creationId="{06CCBE67-7D27-3B06-6D22-E1478B3D691E}"/>
-          </ac:spMkLst>
-        </pc:spChg>
-        <pc:graphicFrameChg chg="add mod">
-          <ac:chgData name="Andrew Turner" userId="9b60647a-c825-4266-aafa-670849c64782" providerId="ADAL" clId="{292526B5-234E-5EAA-AFB8-0412B8CA4453}" dt="2026-06-15T11:57:12.308" v="11988" actId="14100"/>
-          <ac:graphicFrameMkLst>
-            <pc:docMk/>
-            <pc:sldMk cId="3397942053" sldId="1704"/>
-            <ac:graphicFrameMk id="5" creationId="{490CD07F-B1CA-0BA3-283A-C286C7B38CD0}"/>
-          </ac:graphicFrameMkLst>
-        </pc:graphicFrameChg>
-      </pc:sldChg>
-      <pc:sldChg chg="modSp new mod">
-        <pc:chgData name="Andrew Turner" userId="9b60647a-c825-4266-aafa-670849c64782" providerId="ADAL" clId="{292526B5-234E-5EAA-AFB8-0412B8CA4453}" dt="2026-06-08T08:04:39.776" v="53" actId="20577"/>
-        <pc:sldMkLst>
-          <pc:docMk/>
-          <pc:sldMk cId="1420634101" sldId="1705"/>
-        </pc:sldMkLst>
-        <pc:spChg chg="mod">
-          <ac:chgData name="Andrew Turner" userId="9b60647a-c825-4266-aafa-670849c64782" providerId="ADAL" clId="{292526B5-234E-5EAA-AFB8-0412B8CA4453}" dt="2026-06-08T08:04:39.776" v="53" actId="20577"/>
-          <ac:spMkLst>
-            <pc:docMk/>
-            <pc:sldMk cId="1420634101" sldId="1705"/>
-            <ac:spMk id="2" creationId="{62C754DD-5F6C-627E-E3FF-3A9D998E9028}"/>
-          </ac:spMkLst>
-        </pc:spChg>
-      </pc:sldChg>
       <pc:sldChg chg="addSp modSp new mod">
-        <pc:chgData name="Andrew Turner" userId="9b60647a-c825-4266-aafa-670849c64782" providerId="ADAL" clId="{292526B5-234E-5EAA-AFB8-0412B8CA4453}" dt="2026-06-16T16:48:56.608" v="13557" actId="20577"/>
+        <pc:chgData name="Andrew Turner" userId="9b60647a-c825-4266-aafa-670849c64782" providerId="ADAL" clId="{292526B5-234E-5EAA-AFB8-0412B8CA4453}" dt="2026-10-01T19:36:24.511" v="15606" actId="20577"/>
         <pc:sldMkLst>
           <pc:docMk/>
           <pc:sldMk cId="3907604554" sldId="1706"/>
         </pc:sldMkLst>
         <pc:spChg chg="mod">
-          <ac:chgData name="Andrew Turner" userId="9b60647a-c825-4266-aafa-670849c64782" providerId="ADAL" clId="{292526B5-234E-5EAA-AFB8-0412B8CA4453}" dt="2026-06-16T16:48:56.608" v="13557" actId="20577"/>
+          <ac:chgData name="Andrew Turner" userId="9b60647a-c825-4266-aafa-670849c64782" providerId="ADAL" clId="{292526B5-234E-5EAA-AFB8-0412B8CA4453}" dt="2026-10-01T19:36:24.511" v="15606" actId="20577"/>
           <ac:spMkLst>
             <pc:docMk/>
             <pc:sldMk cId="3907604554" sldId="1706"/>
@@ -553,15 +176,15 @@
           </ac:spMkLst>
         </pc:spChg>
         <pc:spChg chg="mod">
-          <ac:chgData name="Andrew Turner" userId="9b60647a-c825-4266-aafa-670849c64782" providerId="ADAL" clId="{292526B5-234E-5EAA-AFB8-0412B8CA4453}" dt="2026-06-16T16:48:30.703" v="13551" actId="1035"/>
+          <ac:chgData name="Andrew Turner" userId="9b60647a-c825-4266-aafa-670849c64782" providerId="ADAL" clId="{292526B5-234E-5EAA-AFB8-0412B8CA4453}" dt="2026-10-01T19:35:26.864" v="15562" actId="255"/>
           <ac:spMkLst>
             <pc:docMk/>
             <pc:sldMk cId="3907604554" sldId="1706"/>
             <ac:spMk id="3" creationId="{85C4B88C-556A-6E31-6318-5B8827B23CE0}"/>
           </ac:spMkLst>
         </pc:spChg>
-        <pc:graphicFrameChg chg="add mod">
-          <ac:chgData name="Andrew Turner" userId="9b60647a-c825-4266-aafa-670849c64782" providerId="ADAL" clId="{292526B5-234E-5EAA-AFB8-0412B8CA4453}" dt="2026-06-16T16:48:22.822" v="13541" actId="1076"/>
+        <pc:graphicFrameChg chg="mod">
+          <ac:chgData name="Andrew Turner" userId="9b60647a-c825-4266-aafa-670849c64782" providerId="ADAL" clId="{292526B5-234E-5EAA-AFB8-0412B8CA4453}" dt="2026-10-01T19:35:33.159" v="15563" actId="1076"/>
           <ac:graphicFrameMkLst>
             <pc:docMk/>
             <pc:sldMk cId="3907604554" sldId="1706"/>
@@ -569,773 +192,14 @@
           </ac:graphicFrameMkLst>
         </pc:graphicFrameChg>
       </pc:sldChg>
-      <pc:sldChg chg="modSp new mod">
-        <pc:chgData name="Andrew Turner" userId="9b60647a-c825-4266-aafa-670849c64782" providerId="ADAL" clId="{292526B5-234E-5EAA-AFB8-0412B8CA4453}" dt="2026-06-15T15:21:21.936" v="12601" actId="20577"/>
-        <pc:sldMkLst>
-          <pc:docMk/>
-          <pc:sldMk cId="4184960636" sldId="1707"/>
-        </pc:sldMkLst>
-        <pc:spChg chg="mod">
-          <ac:chgData name="Andrew Turner" userId="9b60647a-c825-4266-aafa-670849c64782" providerId="ADAL" clId="{292526B5-234E-5EAA-AFB8-0412B8CA4453}" dt="2026-06-15T15:21:21.936" v="12601" actId="20577"/>
-          <ac:spMkLst>
-            <pc:docMk/>
-            <pc:sldMk cId="4184960636" sldId="1707"/>
-            <ac:spMk id="2" creationId="{D9C50214-CBA8-141A-DA81-9CCF2265F6FA}"/>
-          </ac:spMkLst>
-        </pc:spChg>
-      </pc:sldChg>
-      <pc:sldChg chg="modSp new mod">
-        <pc:chgData name="Andrew Turner" userId="9b60647a-c825-4266-aafa-670849c64782" providerId="ADAL" clId="{292526B5-234E-5EAA-AFB8-0412B8CA4453}" dt="2026-06-08T08:16:10.689" v="1016" actId="20577"/>
-        <pc:sldMkLst>
-          <pc:docMk/>
-          <pc:sldMk cId="2182465690" sldId="1709"/>
-        </pc:sldMkLst>
-        <pc:spChg chg="mod">
-          <ac:chgData name="Andrew Turner" userId="9b60647a-c825-4266-aafa-670849c64782" providerId="ADAL" clId="{292526B5-234E-5EAA-AFB8-0412B8CA4453}" dt="2026-06-08T08:16:10.689" v="1016" actId="20577"/>
-          <ac:spMkLst>
-            <pc:docMk/>
-            <pc:sldMk cId="2182465690" sldId="1709"/>
-            <ac:spMk id="2" creationId="{E15F16C5-32AA-33D1-E25B-B891FF9A206E}"/>
-          </ac:spMkLst>
-        </pc:spChg>
-      </pc:sldChg>
-      <pc:sldChg chg="addSp delSp modSp new mod">
-        <pc:chgData name="Andrew Turner" userId="9b60647a-c825-4266-aafa-670849c64782" providerId="ADAL" clId="{292526B5-234E-5EAA-AFB8-0412B8CA4453}" dt="2026-06-15T15:25:21.279" v="12803" actId="14100"/>
-        <pc:sldMkLst>
-          <pc:docMk/>
-          <pc:sldMk cId="3988362691" sldId="1710"/>
-        </pc:sldMkLst>
-        <pc:spChg chg="mod">
-          <ac:chgData name="Andrew Turner" userId="9b60647a-c825-4266-aafa-670849c64782" providerId="ADAL" clId="{292526B5-234E-5EAA-AFB8-0412B8CA4453}" dt="2026-06-15T15:25:21.279" v="12803" actId="14100"/>
-          <ac:spMkLst>
-            <pc:docMk/>
-            <pc:sldMk cId="3988362691" sldId="1710"/>
-            <ac:spMk id="3" creationId="{6E845FDE-8974-7B84-48AF-6B2CD4995525}"/>
-          </ac:spMkLst>
-        </pc:spChg>
-        <pc:spChg chg="add mod">
-          <ac:chgData name="Andrew Turner" userId="9b60647a-c825-4266-aafa-670849c64782" providerId="ADAL" clId="{292526B5-234E-5EAA-AFB8-0412B8CA4453}" dt="2026-06-09T12:41:39.892" v="7462" actId="20577"/>
-          <ac:spMkLst>
-            <pc:docMk/>
-            <pc:sldMk cId="3988362691" sldId="1710"/>
-            <ac:spMk id="4" creationId="{C515EDFE-3135-1E03-6F6C-8BE1C1B8F052}"/>
-          </ac:spMkLst>
-        </pc:spChg>
-        <pc:spChg chg="add mod">
-          <ac:chgData name="Andrew Turner" userId="9b60647a-c825-4266-aafa-670849c64782" providerId="ADAL" clId="{292526B5-234E-5EAA-AFB8-0412B8CA4453}" dt="2026-06-15T15:24:08.500" v="12770"/>
-          <ac:spMkLst>
-            <pc:docMk/>
-            <pc:sldMk cId="3988362691" sldId="1710"/>
-            <ac:spMk id="11" creationId="{360F1DCC-1B0B-0BFB-EB6B-E4DF2D3A5605}"/>
-          </ac:spMkLst>
-        </pc:spChg>
-        <pc:spChg chg="add mod">
-          <ac:chgData name="Andrew Turner" userId="9b60647a-c825-4266-aafa-670849c64782" providerId="ADAL" clId="{292526B5-234E-5EAA-AFB8-0412B8CA4453}" dt="2026-06-15T15:24:08.500" v="12770"/>
-          <ac:spMkLst>
-            <pc:docMk/>
-            <pc:sldMk cId="3988362691" sldId="1710"/>
-            <ac:spMk id="12" creationId="{2EA13F35-B66F-C2C4-1212-EAB1342A93AB}"/>
-          </ac:spMkLst>
-        </pc:spChg>
-        <pc:grpChg chg="add mod">
-          <ac:chgData name="Andrew Turner" userId="9b60647a-c825-4266-aafa-670849c64782" providerId="ADAL" clId="{292526B5-234E-5EAA-AFB8-0412B8CA4453}" dt="2026-06-15T15:24:16.335" v="12772" actId="1076"/>
-          <ac:grpSpMkLst>
-            <pc:docMk/>
-            <pc:sldMk cId="3988362691" sldId="1710"/>
-            <ac:grpSpMk id="10" creationId="{3B344B94-9B29-83F4-6959-9EC2D9F498A1}"/>
-          </ac:grpSpMkLst>
-        </pc:grpChg>
-      </pc:sldChg>
-      <pc:sldChg chg="addSp delSp modSp new mod">
-        <pc:chgData name="Andrew Turner" userId="9b60647a-c825-4266-aafa-670849c64782" providerId="ADAL" clId="{292526B5-234E-5EAA-AFB8-0412B8CA4453}" dt="2026-06-15T15:30:43.601" v="13180" actId="478"/>
-        <pc:sldMkLst>
-          <pc:docMk/>
-          <pc:sldMk cId="2908258310" sldId="1711"/>
-        </pc:sldMkLst>
-        <pc:spChg chg="mod">
-          <ac:chgData name="Andrew Turner" userId="9b60647a-c825-4266-aafa-670849c64782" providerId="ADAL" clId="{292526B5-234E-5EAA-AFB8-0412B8CA4453}" dt="2026-06-15T15:21:43.517" v="12665" actId="20577"/>
-          <ac:spMkLst>
-            <pc:docMk/>
-            <pc:sldMk cId="2908258310" sldId="1711"/>
-            <ac:spMk id="2" creationId="{2D83EF74-FBA6-F104-45D2-3277B29A1BD9}"/>
-          </ac:spMkLst>
-        </pc:spChg>
-        <pc:spChg chg="add mod">
-          <ac:chgData name="Andrew Turner" userId="9b60647a-c825-4266-aafa-670849c64782" providerId="ADAL" clId="{292526B5-234E-5EAA-AFB8-0412B8CA4453}" dt="2026-06-15T15:30:32.589" v="13178" actId="114"/>
-          <ac:spMkLst>
-            <pc:docMk/>
-            <pc:sldMk cId="2908258310" sldId="1711"/>
-            <ac:spMk id="7" creationId="{10850F01-805C-AB1A-A4A8-01D1C15C30CE}"/>
-          </ac:spMkLst>
-        </pc:spChg>
-        <pc:graphicFrameChg chg="add mod">
-          <ac:chgData name="Andrew Turner" userId="9b60647a-c825-4266-aafa-670849c64782" providerId="ADAL" clId="{292526B5-234E-5EAA-AFB8-0412B8CA4453}" dt="2026-06-15T15:30:40.232" v="13179" actId="1035"/>
-          <ac:graphicFrameMkLst>
-            <pc:docMk/>
-            <pc:sldMk cId="2908258310" sldId="1711"/>
-            <ac:graphicFrameMk id="6" creationId="{29E5274F-8188-4662-5A12-AC3FC5FC9FB4}"/>
-          </ac:graphicFrameMkLst>
-        </pc:graphicFrameChg>
-      </pc:sldChg>
-      <pc:sldChg chg="modSp new mod">
-        <pc:chgData name="Andrew Turner" userId="9b60647a-c825-4266-aafa-670849c64782" providerId="ADAL" clId="{292526B5-234E-5EAA-AFB8-0412B8CA4453}" dt="2026-06-08T08:16:29.750" v="1044" actId="20577"/>
-        <pc:sldMkLst>
-          <pc:docMk/>
-          <pc:sldMk cId="1128641758" sldId="1712"/>
-        </pc:sldMkLst>
-        <pc:spChg chg="mod">
-          <ac:chgData name="Andrew Turner" userId="9b60647a-c825-4266-aafa-670849c64782" providerId="ADAL" clId="{292526B5-234E-5EAA-AFB8-0412B8CA4453}" dt="2026-06-08T08:16:29.750" v="1044" actId="20577"/>
-          <ac:spMkLst>
-            <pc:docMk/>
-            <pc:sldMk cId="1128641758" sldId="1712"/>
-            <ac:spMk id="2" creationId="{DF176810-969C-8504-1AC8-B1452C85A9D0}"/>
-          </ac:spMkLst>
-        </pc:spChg>
-      </pc:sldChg>
-      <pc:sldChg chg="modSp new mod">
-        <pc:chgData name="Andrew Turner" userId="9b60647a-c825-4266-aafa-670849c64782" providerId="ADAL" clId="{292526B5-234E-5EAA-AFB8-0412B8CA4453}" dt="2026-06-15T15:27:58.722" v="12814" actId="114"/>
-        <pc:sldMkLst>
-          <pc:docMk/>
-          <pc:sldMk cId="1462061291" sldId="1713"/>
-        </pc:sldMkLst>
-        <pc:spChg chg="mod">
-          <ac:chgData name="Andrew Turner" userId="9b60647a-c825-4266-aafa-670849c64782" providerId="ADAL" clId="{292526B5-234E-5EAA-AFB8-0412B8CA4453}" dt="2026-06-08T09:07:17.985" v="1687" actId="20577"/>
-          <ac:spMkLst>
-            <pc:docMk/>
-            <pc:sldMk cId="1462061291" sldId="1713"/>
-            <ac:spMk id="2" creationId="{5FCB5980-41EF-11DC-6DAA-5F1763CE4EB7}"/>
-          </ac:spMkLst>
-        </pc:spChg>
-        <pc:spChg chg="mod">
-          <ac:chgData name="Andrew Turner" userId="9b60647a-c825-4266-aafa-670849c64782" providerId="ADAL" clId="{292526B5-234E-5EAA-AFB8-0412B8CA4453}" dt="2026-06-15T15:27:58.722" v="12814" actId="114"/>
-          <ac:spMkLst>
-            <pc:docMk/>
-            <pc:sldMk cId="1462061291" sldId="1713"/>
-            <ac:spMk id="3" creationId="{644CE7C5-A25B-B4E5-CA77-12739A120A91}"/>
-          </ac:spMkLst>
-        </pc:spChg>
-      </pc:sldChg>
-      <pc:sldChg chg="addSp delSp modSp new mod">
-        <pc:chgData name="Andrew Turner" userId="9b60647a-c825-4266-aafa-670849c64782" providerId="ADAL" clId="{292526B5-234E-5EAA-AFB8-0412B8CA4453}" dt="2026-06-15T13:53:00.759" v="12555" actId="1076"/>
-        <pc:sldMkLst>
-          <pc:docMk/>
-          <pc:sldMk cId="2982948507" sldId="1714"/>
-        </pc:sldMkLst>
-        <pc:spChg chg="mod">
-          <ac:chgData name="Andrew Turner" userId="9b60647a-c825-4266-aafa-670849c64782" providerId="ADAL" clId="{292526B5-234E-5EAA-AFB8-0412B8CA4453}" dt="2026-06-08T10:19:27.322" v="5606" actId="27636"/>
-          <ac:spMkLst>
-            <pc:docMk/>
-            <pc:sldMk cId="2982948507" sldId="1714"/>
-            <ac:spMk id="3" creationId="{36D7840D-40AE-B333-8AC8-455BD6723C6F}"/>
-          </ac:spMkLst>
-        </pc:spChg>
-        <pc:spChg chg="add mod">
-          <ac:chgData name="Andrew Turner" userId="9b60647a-c825-4266-aafa-670849c64782" providerId="ADAL" clId="{292526B5-234E-5EAA-AFB8-0412B8CA4453}" dt="2026-06-08T10:21:29.907" v="5692" actId="20577"/>
-          <ac:spMkLst>
-            <pc:docMk/>
-            <pc:sldMk cId="2982948507" sldId="1714"/>
-            <ac:spMk id="4" creationId="{AD1F848F-0703-566C-2E24-3C2E7DFC0680}"/>
-          </ac:spMkLst>
-        </pc:spChg>
-        <pc:spChg chg="add mod">
-          <ac:chgData name="Andrew Turner" userId="9b60647a-c825-4266-aafa-670849c64782" providerId="ADAL" clId="{292526B5-234E-5EAA-AFB8-0412B8CA4453}" dt="2026-06-15T13:52:54.601" v="12554"/>
-          <ac:spMkLst>
-            <pc:docMk/>
-            <pc:sldMk cId="2982948507" sldId="1714"/>
-            <ac:spMk id="8" creationId="{8115FF0F-ED1F-F0A7-7D60-49D2FB2E8862}"/>
-          </ac:spMkLst>
-        </pc:spChg>
-        <pc:spChg chg="add mod">
-          <ac:chgData name="Andrew Turner" userId="9b60647a-c825-4266-aafa-670849c64782" providerId="ADAL" clId="{292526B5-234E-5EAA-AFB8-0412B8CA4453}" dt="2026-06-15T13:52:54.601" v="12554"/>
-          <ac:spMkLst>
-            <pc:docMk/>
-            <pc:sldMk cId="2982948507" sldId="1714"/>
-            <ac:spMk id="9" creationId="{BF601A2C-F735-5B93-A8A4-027CA6FB9C1D}"/>
-          </ac:spMkLst>
-        </pc:spChg>
-        <pc:grpChg chg="add mod">
-          <ac:chgData name="Andrew Turner" userId="9b60647a-c825-4266-aafa-670849c64782" providerId="ADAL" clId="{292526B5-234E-5EAA-AFB8-0412B8CA4453}" dt="2026-06-15T13:53:00.759" v="12555" actId="1076"/>
-          <ac:grpSpMkLst>
-            <pc:docMk/>
-            <pc:sldMk cId="2982948507" sldId="1714"/>
-            <ac:grpSpMk id="7" creationId="{DE96C215-34ED-E2BA-CA93-AB0E8F14CACC}"/>
-          </ac:grpSpMkLst>
-        </pc:grpChg>
-      </pc:sldChg>
-      <pc:sldChg chg="addSp modSp new mod">
-        <pc:chgData name="Andrew Turner" userId="9b60647a-c825-4266-aafa-670849c64782" providerId="ADAL" clId="{292526B5-234E-5EAA-AFB8-0412B8CA4453}" dt="2026-06-16T18:38:42.980" v="14550" actId="1076"/>
-        <pc:sldMkLst>
-          <pc:docMk/>
-          <pc:sldMk cId="2578807886" sldId="1715"/>
-        </pc:sldMkLst>
-        <pc:spChg chg="mod">
-          <ac:chgData name="Andrew Turner" userId="9b60647a-c825-4266-aafa-670849c64782" providerId="ADAL" clId="{292526B5-234E-5EAA-AFB8-0412B8CA4453}" dt="2026-06-08T08:25:22.997" v="1202" actId="20577"/>
-          <ac:spMkLst>
-            <pc:docMk/>
-            <pc:sldMk cId="2578807886" sldId="1715"/>
-            <ac:spMk id="2" creationId="{B2A60E71-11C0-0D69-8D03-616634117267}"/>
-          </ac:spMkLst>
-        </pc:spChg>
-        <pc:spChg chg="mod">
-          <ac:chgData name="Andrew Turner" userId="9b60647a-c825-4266-aafa-670849c64782" providerId="ADAL" clId="{292526B5-234E-5EAA-AFB8-0412B8CA4453}" dt="2026-06-16T14:37:39.722" v="13198" actId="20577"/>
-          <ac:spMkLst>
-            <pc:docMk/>
-            <pc:sldMk cId="2578807886" sldId="1715"/>
-            <ac:spMk id="3" creationId="{E145B534-A52B-5966-838F-60F3A9953054}"/>
-          </ac:spMkLst>
-        </pc:spChg>
-        <pc:spChg chg="add mod">
-          <ac:chgData name="Andrew Turner" userId="9b60647a-c825-4266-aafa-670849c64782" providerId="ADAL" clId="{292526B5-234E-5EAA-AFB8-0412B8CA4453}" dt="2026-06-16T18:38:42.980" v="14550" actId="1076"/>
-          <ac:spMkLst>
-            <pc:docMk/>
-            <pc:sldMk cId="2578807886" sldId="1715"/>
-            <ac:spMk id="4" creationId="{E369FDBB-7E37-BE37-CD90-83D9B399FAD4}"/>
-          </ac:spMkLst>
-        </pc:spChg>
-      </pc:sldChg>
-      <pc:sldChg chg="add">
-        <pc:chgData name="Andrew Turner" userId="9b60647a-c825-4266-aafa-670849c64782" providerId="ADAL" clId="{292526B5-234E-5EAA-AFB8-0412B8CA4453}" dt="2026-06-08T08:26:18.937" v="1203"/>
-        <pc:sldMkLst>
-          <pc:docMk/>
-          <pc:sldMk cId="4071893396" sldId="1716"/>
-        </pc:sldMkLst>
-      </pc:sldChg>
-      <pc:sldChg chg="add">
-        <pc:chgData name="Andrew Turner" userId="9b60647a-c825-4266-aafa-670849c64782" providerId="ADAL" clId="{292526B5-234E-5EAA-AFB8-0412B8CA4453}" dt="2026-06-08T08:26:18.937" v="1203"/>
-        <pc:sldMkLst>
-          <pc:docMk/>
-          <pc:sldMk cId="2081503611" sldId="1717"/>
-        </pc:sldMkLst>
-      </pc:sldChg>
-      <pc:sldChg chg="modSp new mod">
-        <pc:chgData name="Andrew Turner" userId="9b60647a-c825-4266-aafa-670849c64782" providerId="ADAL" clId="{292526B5-234E-5EAA-AFB8-0412B8CA4453}" dt="2026-06-08T08:26:40.231" v="1237" actId="20577"/>
-        <pc:sldMkLst>
-          <pc:docMk/>
-          <pc:sldMk cId="3881966305" sldId="1718"/>
-        </pc:sldMkLst>
-        <pc:spChg chg="mod">
-          <ac:chgData name="Andrew Turner" userId="9b60647a-c825-4266-aafa-670849c64782" providerId="ADAL" clId="{292526B5-234E-5EAA-AFB8-0412B8CA4453}" dt="2026-06-08T08:26:40.231" v="1237" actId="20577"/>
-          <ac:spMkLst>
-            <pc:docMk/>
-            <pc:sldMk cId="3881966305" sldId="1718"/>
-            <ac:spMk id="2" creationId="{ACAE9AC1-2179-7A02-A2A9-02BBC9DE9AD5}"/>
-          </ac:spMkLst>
-        </pc:spChg>
-      </pc:sldChg>
-      <pc:sldChg chg="modSp new mod">
-        <pc:chgData name="Andrew Turner" userId="9b60647a-c825-4266-aafa-670849c64782" providerId="ADAL" clId="{292526B5-234E-5EAA-AFB8-0412B8CA4453}" dt="2026-06-08T08:27:28.833" v="1280" actId="20577"/>
-        <pc:sldMkLst>
-          <pc:docMk/>
-          <pc:sldMk cId="2103501107" sldId="1719"/>
-        </pc:sldMkLst>
-        <pc:spChg chg="mod">
-          <ac:chgData name="Andrew Turner" userId="9b60647a-c825-4266-aafa-670849c64782" providerId="ADAL" clId="{292526B5-234E-5EAA-AFB8-0412B8CA4453}" dt="2026-06-08T08:27:28.833" v="1280" actId="20577"/>
-          <ac:spMkLst>
-            <pc:docMk/>
-            <pc:sldMk cId="2103501107" sldId="1719"/>
-            <ac:spMk id="2" creationId="{2265659E-6E2D-E0E9-83EA-F02F3194EF77}"/>
-          </ac:spMkLst>
-        </pc:spChg>
-      </pc:sldChg>
-      <pc:sldChg chg="addSp delSp modSp new mod">
-        <pc:chgData name="Andrew Turner" userId="9b60647a-c825-4266-aafa-670849c64782" providerId="ADAL" clId="{292526B5-234E-5EAA-AFB8-0412B8CA4453}" dt="2026-06-15T13:53:24.448" v="12559" actId="1076"/>
-        <pc:sldMkLst>
-          <pc:docMk/>
-          <pc:sldMk cId="2035178689" sldId="1720"/>
-        </pc:sldMkLst>
-        <pc:spChg chg="mod">
-          <ac:chgData name="Andrew Turner" userId="9b60647a-c825-4266-aafa-670849c64782" providerId="ADAL" clId="{292526B5-234E-5EAA-AFB8-0412B8CA4453}" dt="2026-06-08T10:28:05.143" v="6397" actId="20577"/>
-          <ac:spMkLst>
-            <pc:docMk/>
-            <pc:sldMk cId="2035178689" sldId="1720"/>
-            <ac:spMk id="3" creationId="{4830AB2A-A9A6-975B-B152-B6DA907CEBA1}"/>
-          </ac:spMkLst>
-        </pc:spChg>
-        <pc:spChg chg="add mod">
-          <ac:chgData name="Andrew Turner" userId="9b60647a-c825-4266-aafa-670849c64782" providerId="ADAL" clId="{292526B5-234E-5EAA-AFB8-0412B8CA4453}" dt="2026-06-08T10:21:56.102" v="5750" actId="20577"/>
-          <ac:spMkLst>
-            <pc:docMk/>
-            <pc:sldMk cId="2035178689" sldId="1720"/>
-            <ac:spMk id="4" creationId="{0DF4C68F-4F80-065A-1739-CE0C7A147805}"/>
-          </ac:spMkLst>
-        </pc:spChg>
-        <pc:spChg chg="add mod">
-          <ac:chgData name="Andrew Turner" userId="9b60647a-c825-4266-aafa-670849c64782" providerId="ADAL" clId="{292526B5-234E-5EAA-AFB8-0412B8CA4453}" dt="2026-06-15T13:53:16.972" v="12558"/>
-          <ac:spMkLst>
-            <pc:docMk/>
-            <pc:sldMk cId="2035178689" sldId="1720"/>
-            <ac:spMk id="8" creationId="{72F1270B-24E4-B0BF-A9DB-513B65A0500E}"/>
-          </ac:spMkLst>
-        </pc:spChg>
-        <pc:spChg chg="add mod">
-          <ac:chgData name="Andrew Turner" userId="9b60647a-c825-4266-aafa-670849c64782" providerId="ADAL" clId="{292526B5-234E-5EAA-AFB8-0412B8CA4453}" dt="2026-06-15T13:53:16.972" v="12558"/>
-          <ac:spMkLst>
-            <pc:docMk/>
-            <pc:sldMk cId="2035178689" sldId="1720"/>
-            <ac:spMk id="9" creationId="{7CEBD05D-9C0A-6D57-8012-C1CDFF19D054}"/>
-          </ac:spMkLst>
-        </pc:spChg>
-        <pc:grpChg chg="add mod">
-          <ac:chgData name="Andrew Turner" userId="9b60647a-c825-4266-aafa-670849c64782" providerId="ADAL" clId="{292526B5-234E-5EAA-AFB8-0412B8CA4453}" dt="2026-06-15T13:53:24.448" v="12559" actId="1076"/>
-          <ac:grpSpMkLst>
-            <pc:docMk/>
-            <pc:sldMk cId="2035178689" sldId="1720"/>
-            <ac:grpSpMk id="7" creationId="{32BF129D-4FB0-2775-ABF3-B8A086E296A3}"/>
-          </ac:grpSpMkLst>
-        </pc:grpChg>
-      </pc:sldChg>
-      <pc:sldChg chg="addSp delSp modSp new mod">
-        <pc:chgData name="Andrew Turner" userId="9b60647a-c825-4266-aafa-670849c64782" providerId="ADAL" clId="{292526B5-234E-5EAA-AFB8-0412B8CA4453}" dt="2026-06-15T15:24:34.388" v="12776" actId="1076"/>
-        <pc:sldMkLst>
-          <pc:docMk/>
-          <pc:sldMk cId="1576817759" sldId="1721"/>
-        </pc:sldMkLst>
-        <pc:spChg chg="mod">
-          <ac:chgData name="Andrew Turner" userId="9b60647a-c825-4266-aafa-670849c64782" providerId="ADAL" clId="{292526B5-234E-5EAA-AFB8-0412B8CA4453}" dt="2026-06-09T13:02:32.445" v="9210" actId="20577"/>
-          <ac:spMkLst>
-            <pc:docMk/>
-            <pc:sldMk cId="1576817759" sldId="1721"/>
-            <ac:spMk id="3" creationId="{9E7EBC6E-2CB8-CE33-F3DC-B33E4DDDD4AC}"/>
-          </ac:spMkLst>
-        </pc:spChg>
-        <pc:spChg chg="add mod">
-          <ac:chgData name="Andrew Turner" userId="9b60647a-c825-4266-aafa-670849c64782" providerId="ADAL" clId="{292526B5-234E-5EAA-AFB8-0412B8CA4453}" dt="2026-06-09T12:57:12.165" v="8402" actId="20577"/>
-          <ac:spMkLst>
-            <pc:docMk/>
-            <pc:sldMk cId="1576817759" sldId="1721"/>
-            <ac:spMk id="4" creationId="{D4007E29-481A-630C-1517-A5D23AE1ECF3}"/>
-          </ac:spMkLst>
-        </pc:spChg>
-        <pc:spChg chg="add mod">
-          <ac:chgData name="Andrew Turner" userId="9b60647a-c825-4266-aafa-670849c64782" providerId="ADAL" clId="{292526B5-234E-5EAA-AFB8-0412B8CA4453}" dt="2026-06-15T15:24:30.702" v="12775"/>
-          <ac:spMkLst>
-            <pc:docMk/>
-            <pc:sldMk cId="1576817759" sldId="1721"/>
-            <ac:spMk id="8" creationId="{E8AC01E7-C125-B0D1-2E6E-9AE4190D9F78}"/>
-          </ac:spMkLst>
-        </pc:spChg>
-        <pc:spChg chg="add mod">
-          <ac:chgData name="Andrew Turner" userId="9b60647a-c825-4266-aafa-670849c64782" providerId="ADAL" clId="{292526B5-234E-5EAA-AFB8-0412B8CA4453}" dt="2026-06-15T15:24:30.702" v="12775"/>
-          <ac:spMkLst>
-            <pc:docMk/>
-            <pc:sldMk cId="1576817759" sldId="1721"/>
-            <ac:spMk id="9" creationId="{49833BA9-6AE5-D3E3-5CB5-A17FAB4D81E7}"/>
-          </ac:spMkLst>
-        </pc:spChg>
-        <pc:grpChg chg="add mod">
-          <ac:chgData name="Andrew Turner" userId="9b60647a-c825-4266-aafa-670849c64782" providerId="ADAL" clId="{292526B5-234E-5EAA-AFB8-0412B8CA4453}" dt="2026-06-15T15:24:34.388" v="12776" actId="1076"/>
-          <ac:grpSpMkLst>
-            <pc:docMk/>
-            <pc:sldMk cId="1576817759" sldId="1721"/>
-            <ac:grpSpMk id="7" creationId="{78879E1D-1ACE-1B06-37D3-139DFD492698}"/>
-          </ac:grpSpMkLst>
-        </pc:grpChg>
-      </pc:sldChg>
-      <pc:sldChg chg="modSp new mod">
-        <pc:chgData name="Andrew Turner" userId="9b60647a-c825-4266-aafa-670849c64782" providerId="ADAL" clId="{292526B5-234E-5EAA-AFB8-0412B8CA4453}" dt="2026-06-08T09:34:09.636" v="3413" actId="20577"/>
-        <pc:sldMkLst>
-          <pc:docMk/>
-          <pc:sldMk cId="715148592" sldId="1722"/>
-        </pc:sldMkLst>
-        <pc:spChg chg="mod">
-          <ac:chgData name="Andrew Turner" userId="9b60647a-c825-4266-aafa-670849c64782" providerId="ADAL" clId="{292526B5-234E-5EAA-AFB8-0412B8CA4453}" dt="2026-06-08T09:08:19.173" v="1752" actId="20577"/>
-          <ac:spMkLst>
-            <pc:docMk/>
-            <pc:sldMk cId="715148592" sldId="1722"/>
-            <ac:spMk id="2" creationId="{4C59C89F-EF2E-948A-5FAF-AFA9D4E580B9}"/>
-          </ac:spMkLst>
-        </pc:spChg>
-        <pc:spChg chg="mod">
-          <ac:chgData name="Andrew Turner" userId="9b60647a-c825-4266-aafa-670849c64782" providerId="ADAL" clId="{292526B5-234E-5EAA-AFB8-0412B8CA4453}" dt="2026-06-08T09:34:09.636" v="3413" actId="20577"/>
-          <ac:spMkLst>
-            <pc:docMk/>
-            <pc:sldMk cId="715148592" sldId="1722"/>
-            <ac:spMk id="3" creationId="{CACDCEA4-E07A-B9B7-E0A5-43364AA9BC6E}"/>
-          </ac:spMkLst>
-        </pc:spChg>
-      </pc:sldChg>
-      <pc:sldChg chg="addSp delSp modSp new mod">
-        <pc:chgData name="Andrew Turner" userId="9b60647a-c825-4266-aafa-670849c64782" providerId="ADAL" clId="{292526B5-234E-5EAA-AFB8-0412B8CA4453}" dt="2026-06-15T15:31:29.035" v="13184" actId="207"/>
-        <pc:sldMkLst>
-          <pc:docMk/>
-          <pc:sldMk cId="2888425215" sldId="1723"/>
-        </pc:sldMkLst>
-        <pc:spChg chg="mod">
-          <ac:chgData name="Andrew Turner" userId="9b60647a-c825-4266-aafa-670849c64782" providerId="ADAL" clId="{292526B5-234E-5EAA-AFB8-0412B8CA4453}" dt="2026-06-08T09:27:55.802" v="3126" actId="20577"/>
-          <ac:spMkLst>
-            <pc:docMk/>
-            <pc:sldMk cId="2888425215" sldId="1723"/>
-            <ac:spMk id="3" creationId="{8E02E4E5-2994-D4AE-D005-119923B1A073}"/>
-          </ac:spMkLst>
-        </pc:spChg>
-        <pc:spChg chg="add mod">
-          <ac:chgData name="Andrew Turner" userId="9b60647a-c825-4266-aafa-670849c64782" providerId="ADAL" clId="{292526B5-234E-5EAA-AFB8-0412B8CA4453}" dt="2026-06-15T15:31:29.035" v="13184" actId="207"/>
-          <ac:spMkLst>
-            <pc:docMk/>
-            <pc:sldMk cId="2888425215" sldId="1723"/>
-            <ac:spMk id="4" creationId="{19B33E3F-45A9-9548-C1F8-17B40F5BDB5D}"/>
-          </ac:spMkLst>
-        </pc:spChg>
-        <pc:spChg chg="add mod">
-          <ac:chgData name="Andrew Turner" userId="9b60647a-c825-4266-aafa-670849c64782" providerId="ADAL" clId="{292526B5-234E-5EAA-AFB8-0412B8CA4453}" dt="2026-06-15T13:51:37.230" v="12538"/>
-          <ac:spMkLst>
-            <pc:docMk/>
-            <pc:sldMk cId="2888425215" sldId="1723"/>
-            <ac:spMk id="17" creationId="{56A6A606-B07E-71AF-24C8-0382786DE46F}"/>
-          </ac:spMkLst>
-        </pc:spChg>
-        <pc:spChg chg="add mod">
-          <ac:chgData name="Andrew Turner" userId="9b60647a-c825-4266-aafa-670849c64782" providerId="ADAL" clId="{292526B5-234E-5EAA-AFB8-0412B8CA4453}" dt="2026-06-15T13:51:37.230" v="12538"/>
-          <ac:spMkLst>
-            <pc:docMk/>
-            <pc:sldMk cId="2888425215" sldId="1723"/>
-            <ac:spMk id="18" creationId="{DBA444E7-60F7-3877-7E0F-9023C32D6540}"/>
-          </ac:spMkLst>
-        </pc:spChg>
-        <pc:grpChg chg="add mod">
-          <ac:chgData name="Andrew Turner" userId="9b60647a-c825-4266-aafa-670849c64782" providerId="ADAL" clId="{292526B5-234E-5EAA-AFB8-0412B8CA4453}" dt="2026-06-15T13:51:43.552" v="12542" actId="1036"/>
-          <ac:grpSpMkLst>
-            <pc:docMk/>
-            <pc:sldMk cId="2888425215" sldId="1723"/>
-            <ac:grpSpMk id="16" creationId="{4EBEDDFE-30C0-EED3-CD2A-2F5C35B70C08}"/>
-          </ac:grpSpMkLst>
-        </pc:grpChg>
-      </pc:sldChg>
-      <pc:sldChg chg="addSp delSp modSp new mod">
-        <pc:chgData name="Andrew Turner" userId="9b60647a-c825-4266-aafa-670849c64782" providerId="ADAL" clId="{292526B5-234E-5EAA-AFB8-0412B8CA4453}" dt="2026-06-15T13:52:09.129" v="12546" actId="1076"/>
-        <pc:sldMkLst>
-          <pc:docMk/>
-          <pc:sldMk cId="1217722168" sldId="1724"/>
-        </pc:sldMkLst>
-        <pc:spChg chg="mod">
-          <ac:chgData name="Andrew Turner" userId="9b60647a-c825-4266-aafa-670849c64782" providerId="ADAL" clId="{292526B5-234E-5EAA-AFB8-0412B8CA4453}" dt="2026-06-08T09:44:16.548" v="4295" actId="20577"/>
-          <ac:spMkLst>
-            <pc:docMk/>
-            <pc:sldMk cId="1217722168" sldId="1724"/>
-            <ac:spMk id="3" creationId="{501E0ACE-E410-F4FF-C068-266FE3820D9F}"/>
-          </ac:spMkLst>
-        </pc:spChg>
-        <pc:spChg chg="add mod">
-          <ac:chgData name="Andrew Turner" userId="9b60647a-c825-4266-aafa-670849c64782" providerId="ADAL" clId="{292526B5-234E-5EAA-AFB8-0412B8CA4453}" dt="2026-06-08T10:21:18.858" v="5679"/>
-          <ac:spMkLst>
-            <pc:docMk/>
-            <pc:sldMk cId="1217722168" sldId="1724"/>
-            <ac:spMk id="4" creationId="{EA406D89-961C-AE61-15F7-2B5A2FA5A5D4}"/>
-          </ac:spMkLst>
-        </pc:spChg>
-        <pc:spChg chg="add mod">
-          <ac:chgData name="Andrew Turner" userId="9b60647a-c825-4266-aafa-670849c64782" providerId="ADAL" clId="{292526B5-234E-5EAA-AFB8-0412B8CA4453}" dt="2026-06-15T13:51:59.951" v="12544"/>
-          <ac:spMkLst>
-            <pc:docMk/>
-            <pc:sldMk cId="1217722168" sldId="1724"/>
-            <ac:spMk id="13" creationId="{EFA26306-9271-0423-5138-91917F1CD206}"/>
-          </ac:spMkLst>
-        </pc:spChg>
-        <pc:spChg chg="add mod">
-          <ac:chgData name="Andrew Turner" userId="9b60647a-c825-4266-aafa-670849c64782" providerId="ADAL" clId="{292526B5-234E-5EAA-AFB8-0412B8CA4453}" dt="2026-06-15T13:51:59.951" v="12544"/>
-          <ac:spMkLst>
-            <pc:docMk/>
-            <pc:sldMk cId="1217722168" sldId="1724"/>
-            <ac:spMk id="14" creationId="{8225C5E7-80E2-9211-9189-F8BA21FF3546}"/>
-          </ac:spMkLst>
-        </pc:spChg>
-        <pc:grpChg chg="add mod">
-          <ac:chgData name="Andrew Turner" userId="9b60647a-c825-4266-aafa-670849c64782" providerId="ADAL" clId="{292526B5-234E-5EAA-AFB8-0412B8CA4453}" dt="2026-06-15T13:52:09.129" v="12546" actId="1076"/>
-          <ac:grpSpMkLst>
-            <pc:docMk/>
-            <pc:sldMk cId="1217722168" sldId="1724"/>
-            <ac:grpSpMk id="12" creationId="{567A43C3-4B99-20FB-0148-6482A24658F7}"/>
-          </ac:grpSpMkLst>
-        </pc:grpChg>
-      </pc:sldChg>
-      <pc:sldChg chg="modSp new mod">
-        <pc:chgData name="Andrew Turner" userId="9b60647a-c825-4266-aafa-670849c64782" providerId="ADAL" clId="{292526B5-234E-5EAA-AFB8-0412B8CA4453}" dt="2026-06-09T13:46:16.292" v="10594" actId="20577"/>
-        <pc:sldMkLst>
-          <pc:docMk/>
-          <pc:sldMk cId="3072585544" sldId="1725"/>
-        </pc:sldMkLst>
-        <pc:spChg chg="mod">
-          <ac:chgData name="Andrew Turner" userId="9b60647a-c825-4266-aafa-670849c64782" providerId="ADAL" clId="{292526B5-234E-5EAA-AFB8-0412B8CA4453}" dt="2026-06-09T13:46:04.727" v="10565" actId="20577"/>
-          <ac:spMkLst>
-            <pc:docMk/>
-            <pc:sldMk cId="3072585544" sldId="1725"/>
-            <ac:spMk id="2" creationId="{BC834AF0-139A-5249-A89C-09FE6F8BFB95}"/>
-          </ac:spMkLst>
-        </pc:spChg>
-        <pc:spChg chg="mod">
-          <ac:chgData name="Andrew Turner" userId="9b60647a-c825-4266-aafa-670849c64782" providerId="ADAL" clId="{292526B5-234E-5EAA-AFB8-0412B8CA4453}" dt="2026-06-09T13:46:16.292" v="10594" actId="20577"/>
-          <ac:spMkLst>
-            <pc:docMk/>
-            <pc:sldMk cId="3072585544" sldId="1725"/>
-            <ac:spMk id="3" creationId="{9C8327DB-4B56-455D-F96F-3F438077AFA9}"/>
-          </ac:spMkLst>
-        </pc:spChg>
-      </pc:sldChg>
-      <pc:sldChg chg="modSp new mod">
-        <pc:chgData name="Andrew Turner" userId="9b60647a-c825-4266-aafa-670849c64782" providerId="ADAL" clId="{292526B5-234E-5EAA-AFB8-0412B8CA4453}" dt="2026-06-08T09:32:44.823" v="3391" actId="20577"/>
-        <pc:sldMkLst>
-          <pc:docMk/>
-          <pc:sldMk cId="719358815" sldId="1726"/>
-        </pc:sldMkLst>
-        <pc:spChg chg="mod">
-          <ac:chgData name="Andrew Turner" userId="9b60647a-c825-4266-aafa-670849c64782" providerId="ADAL" clId="{292526B5-234E-5EAA-AFB8-0412B8CA4453}" dt="2026-06-08T09:32:44.823" v="3391" actId="20577"/>
-          <ac:spMkLst>
-            <pc:docMk/>
-            <pc:sldMk cId="719358815" sldId="1726"/>
-            <ac:spMk id="2" creationId="{EEE1F6E3-BBFF-6B97-A483-ECA88E1EB834}"/>
-          </ac:spMkLst>
-        </pc:spChg>
-      </pc:sldChg>
-      <pc:sldChg chg="addSp delSp modSp new mod">
-        <pc:chgData name="Andrew Turner" userId="9b60647a-c825-4266-aafa-670849c64782" providerId="ADAL" clId="{292526B5-234E-5EAA-AFB8-0412B8CA4453}" dt="2026-06-17T09:55:28.530" v="15397" actId="20577"/>
-        <pc:sldMkLst>
-          <pc:docMk/>
-          <pc:sldMk cId="2270402053" sldId="1727"/>
-        </pc:sldMkLst>
-        <pc:spChg chg="mod">
-          <ac:chgData name="Andrew Turner" userId="9b60647a-c825-4266-aafa-670849c64782" providerId="ADAL" clId="{292526B5-234E-5EAA-AFB8-0412B8CA4453}" dt="2026-06-17T09:55:28.530" v="15397" actId="20577"/>
-          <ac:spMkLst>
-            <pc:docMk/>
-            <pc:sldMk cId="2270402053" sldId="1727"/>
-            <ac:spMk id="3" creationId="{E4CA3DFC-C0E1-3219-C258-BEB83AAB5F7E}"/>
-          </ac:spMkLst>
-        </pc:spChg>
-        <pc:spChg chg="add mod">
-          <ac:chgData name="Andrew Turner" userId="9b60647a-c825-4266-aafa-670849c64782" providerId="ADAL" clId="{292526B5-234E-5EAA-AFB8-0412B8CA4453}" dt="2026-06-08T10:21:20.571" v="5680"/>
-          <ac:spMkLst>
-            <pc:docMk/>
-            <pc:sldMk cId="2270402053" sldId="1727"/>
-            <ac:spMk id="4" creationId="{41EC8B70-2F51-7ECB-83F1-A12993833862}"/>
-          </ac:spMkLst>
-        </pc:spChg>
-        <pc:spChg chg="add mod">
-          <ac:chgData name="Andrew Turner" userId="9b60647a-c825-4266-aafa-670849c64782" providerId="ADAL" clId="{292526B5-234E-5EAA-AFB8-0412B8CA4453}" dt="2026-06-15T13:52:32.079" v="12550"/>
-          <ac:spMkLst>
-            <pc:docMk/>
-            <pc:sldMk cId="2270402053" sldId="1727"/>
-            <ac:spMk id="8" creationId="{EFDDC785-8729-92AF-5916-B8502E5A740D}"/>
-          </ac:spMkLst>
-        </pc:spChg>
-        <pc:spChg chg="add mod">
-          <ac:chgData name="Andrew Turner" userId="9b60647a-c825-4266-aafa-670849c64782" providerId="ADAL" clId="{292526B5-234E-5EAA-AFB8-0412B8CA4453}" dt="2026-06-15T13:55:48.828" v="12578" actId="20577"/>
-          <ac:spMkLst>
-            <pc:docMk/>
-            <pc:sldMk cId="2270402053" sldId="1727"/>
-            <ac:spMk id="9" creationId="{E9C6A9C8-517E-C096-9265-1966993DA6DE}"/>
-          </ac:spMkLst>
-        </pc:spChg>
-        <pc:grpChg chg="add mod">
-          <ac:chgData name="Andrew Turner" userId="9b60647a-c825-4266-aafa-670849c64782" providerId="ADAL" clId="{292526B5-234E-5EAA-AFB8-0412B8CA4453}" dt="2026-06-15T13:52:36.515" v="12551" actId="1076"/>
-          <ac:grpSpMkLst>
-            <pc:docMk/>
-            <pc:sldMk cId="2270402053" sldId="1727"/>
-            <ac:grpSpMk id="7" creationId="{638467BC-A234-74F7-3504-91034C677EC9}"/>
-          </ac:grpSpMkLst>
-        </pc:grpChg>
-      </pc:sldChg>
-      <pc:sldChg chg="modSp new mod">
-        <pc:chgData name="Andrew Turner" userId="9b60647a-c825-4266-aafa-670849c64782" providerId="ADAL" clId="{292526B5-234E-5EAA-AFB8-0412B8CA4453}" dt="2026-06-08T09:50:41.206" v="5144" actId="313"/>
-        <pc:sldMkLst>
-          <pc:docMk/>
-          <pc:sldMk cId="255959611" sldId="1728"/>
-        </pc:sldMkLst>
-        <pc:spChg chg="mod">
-          <ac:chgData name="Andrew Turner" userId="9b60647a-c825-4266-aafa-670849c64782" providerId="ADAL" clId="{292526B5-234E-5EAA-AFB8-0412B8CA4453}" dt="2026-06-08T09:48:42.451" v="4770" actId="20577"/>
-          <ac:spMkLst>
-            <pc:docMk/>
-            <pc:sldMk cId="255959611" sldId="1728"/>
-            <ac:spMk id="2" creationId="{723FD012-7837-9202-AC44-A4DE209D3E74}"/>
-          </ac:spMkLst>
-        </pc:spChg>
-        <pc:spChg chg="mod">
-          <ac:chgData name="Andrew Turner" userId="9b60647a-c825-4266-aafa-670849c64782" providerId="ADAL" clId="{292526B5-234E-5EAA-AFB8-0412B8CA4453}" dt="2026-06-08T09:50:41.206" v="5144" actId="313"/>
-          <ac:spMkLst>
-            <pc:docMk/>
-            <pc:sldMk cId="255959611" sldId="1728"/>
-            <ac:spMk id="3" creationId="{07C217AF-1DF4-D381-5B24-43989B0C3532}"/>
-          </ac:spMkLst>
-        </pc:spChg>
-      </pc:sldChg>
-      <pc:sldChg chg="addSp delSp modSp new mod">
-        <pc:chgData name="Andrew Turner" userId="9b60647a-c825-4266-aafa-670849c64782" providerId="ADAL" clId="{292526B5-234E-5EAA-AFB8-0412B8CA4453}" dt="2026-06-15T13:53:47.588" v="12568" actId="20577"/>
-        <pc:sldMkLst>
-          <pc:docMk/>
-          <pc:sldMk cId="2534967378" sldId="1729"/>
-        </pc:sldMkLst>
-        <pc:spChg chg="mod">
-          <ac:chgData name="Andrew Turner" userId="9b60647a-c825-4266-aafa-670849c64782" providerId="ADAL" clId="{292526B5-234E-5EAA-AFB8-0412B8CA4453}" dt="2026-06-08T10:34:51.472" v="7396" actId="20577"/>
-          <ac:spMkLst>
-            <pc:docMk/>
-            <pc:sldMk cId="2534967378" sldId="1729"/>
-            <ac:spMk id="3" creationId="{1C499E3C-FB47-A04F-5C35-C9312E8F76AD}"/>
-          </ac:spMkLst>
-        </pc:spChg>
-        <pc:spChg chg="add mod">
-          <ac:chgData name="Andrew Turner" userId="9b60647a-c825-4266-aafa-670849c64782" providerId="ADAL" clId="{292526B5-234E-5EAA-AFB8-0412B8CA4453}" dt="2026-06-08T10:35:06.177" v="7397"/>
-          <ac:spMkLst>
-            <pc:docMk/>
-            <pc:sldMk cId="2534967378" sldId="1729"/>
-            <ac:spMk id="4" creationId="{F9CBC057-ABC8-C941-F3AB-C9BD4CBB9EE1}"/>
-          </ac:spMkLst>
-        </pc:spChg>
-        <pc:spChg chg="add mod">
-          <ac:chgData name="Andrew Turner" userId="9b60647a-c825-4266-aafa-670849c64782" providerId="ADAL" clId="{292526B5-234E-5EAA-AFB8-0412B8CA4453}" dt="2026-06-15T13:53:33.027" v="12562"/>
-          <ac:spMkLst>
-            <pc:docMk/>
-            <pc:sldMk cId="2534967378" sldId="1729"/>
-            <ac:spMk id="8" creationId="{F5D1A943-8562-C8B0-8074-DCE11A76DF9C}"/>
-          </ac:spMkLst>
-        </pc:spChg>
-        <pc:spChg chg="add mod">
-          <ac:chgData name="Andrew Turner" userId="9b60647a-c825-4266-aafa-670849c64782" providerId="ADAL" clId="{292526B5-234E-5EAA-AFB8-0412B8CA4453}" dt="2026-06-15T13:53:47.588" v="12568" actId="20577"/>
-          <ac:spMkLst>
-            <pc:docMk/>
-            <pc:sldMk cId="2534967378" sldId="1729"/>
-            <ac:spMk id="9" creationId="{626E4C6F-DE40-5C7B-C513-2DD052E1A676}"/>
-          </ac:spMkLst>
-        </pc:spChg>
-        <pc:grpChg chg="add mod">
-          <ac:chgData name="Andrew Turner" userId="9b60647a-c825-4266-aafa-670849c64782" providerId="ADAL" clId="{292526B5-234E-5EAA-AFB8-0412B8CA4453}" dt="2026-06-15T13:53:38.032" v="12563" actId="1076"/>
-          <ac:grpSpMkLst>
-            <pc:docMk/>
-            <pc:sldMk cId="2534967378" sldId="1729"/>
-            <ac:grpSpMk id="7" creationId="{2D6DF079-378C-AF59-9329-C6AFC1BFEE76}"/>
-          </ac:grpSpMkLst>
-        </pc:grpChg>
-      </pc:sldChg>
-      <pc:sldChg chg="addSp delSp modSp new mod">
-        <pc:chgData name="Andrew Turner" userId="9b60647a-c825-4266-aafa-670849c64782" providerId="ADAL" clId="{292526B5-234E-5EAA-AFB8-0412B8CA4453}" dt="2026-06-15T15:25:10.934" v="12802" actId="114"/>
-        <pc:sldMkLst>
-          <pc:docMk/>
-          <pc:sldMk cId="1241649059" sldId="1730"/>
-        </pc:sldMkLst>
-        <pc:spChg chg="mod">
-          <ac:chgData name="Andrew Turner" userId="9b60647a-c825-4266-aafa-670849c64782" providerId="ADAL" clId="{292526B5-234E-5EAA-AFB8-0412B8CA4453}" dt="2026-06-09T13:44:02.330" v="10516" actId="20577"/>
-          <ac:spMkLst>
-            <pc:docMk/>
-            <pc:sldMk cId="1241649059" sldId="1730"/>
-            <ac:spMk id="2" creationId="{E9812468-3249-1A9E-0BE4-818D58FD602F}"/>
-          </ac:spMkLst>
-        </pc:spChg>
-        <pc:spChg chg="add mod">
-          <ac:chgData name="Andrew Turner" userId="9b60647a-c825-4266-aafa-670849c64782" providerId="ADAL" clId="{292526B5-234E-5EAA-AFB8-0412B8CA4453}" dt="2026-06-15T15:25:10.934" v="12802" actId="114"/>
-          <ac:spMkLst>
-            <pc:docMk/>
-            <pc:sldMk cId="1241649059" sldId="1730"/>
-            <ac:spMk id="4" creationId="{82AD3315-213A-9719-C5F3-0D2576D0B480}"/>
-          </ac:spMkLst>
-        </pc:spChg>
-        <pc:spChg chg="add mod">
-          <ac:chgData name="Andrew Turner" userId="9b60647a-c825-4266-aafa-670849c64782" providerId="ADAL" clId="{292526B5-234E-5EAA-AFB8-0412B8CA4453}" dt="2026-06-09T13:11:43.225" v="9758" actId="20577"/>
-          <ac:spMkLst>
-            <pc:docMk/>
-            <pc:sldMk cId="1241649059" sldId="1730"/>
-            <ac:spMk id="5" creationId="{1FC37032-8E28-2FF2-68CB-38B0E777A051}"/>
-          </ac:spMkLst>
-        </pc:spChg>
-        <pc:graphicFrameChg chg="add mod">
-          <ac:chgData name="Andrew Turner" userId="9b60647a-c825-4266-aafa-670849c64782" providerId="ADAL" clId="{292526B5-234E-5EAA-AFB8-0412B8CA4453}" dt="2026-06-15T15:24:00.138" v="12769" actId="12100"/>
-          <ac:graphicFrameMkLst>
-            <pc:docMk/>
-            <pc:sldMk cId="1241649059" sldId="1730"/>
-            <ac:graphicFrameMk id="3" creationId="{5B5DDE0B-9DC3-1116-1341-E00C81190D2C}"/>
-          </ac:graphicFrameMkLst>
-        </pc:graphicFrameChg>
-      </pc:sldChg>
-      <pc:sldChg chg="addSp delSp modSp new mod">
-        <pc:chgData name="Andrew Turner" userId="9b60647a-c825-4266-aafa-670849c64782" providerId="ADAL" clId="{292526B5-234E-5EAA-AFB8-0412B8CA4453}" dt="2026-06-16T15:38:27.273" v="13265" actId="167"/>
-        <pc:sldMkLst>
-          <pc:docMk/>
-          <pc:sldMk cId="4056739138" sldId="1731"/>
-        </pc:sldMkLst>
-        <pc:spChg chg="mod">
-          <ac:chgData name="Andrew Turner" userId="9b60647a-c825-4266-aafa-670849c64782" providerId="ADAL" clId="{292526B5-234E-5EAA-AFB8-0412B8CA4453}" dt="2026-06-09T13:51:27.172" v="10877" actId="20577"/>
-          <ac:spMkLst>
-            <pc:docMk/>
-            <pc:sldMk cId="4056739138" sldId="1731"/>
-            <ac:spMk id="2" creationId="{1EB95F36-6AC5-7539-54A2-CD82B0E3C951}"/>
-          </ac:spMkLst>
-        </pc:spChg>
-        <pc:spChg chg="add mod">
-          <ac:chgData name="Andrew Turner" userId="9b60647a-c825-4266-aafa-670849c64782" providerId="ADAL" clId="{292526B5-234E-5EAA-AFB8-0412B8CA4453}" dt="2026-06-09T13:53:36.366" v="10905" actId="1036"/>
-          <ac:spMkLst>
-            <pc:docMk/>
-            <pc:sldMk cId="4056739138" sldId="1731"/>
-            <ac:spMk id="6" creationId="{8DD6AFA8-2AE5-4BEA-64B8-9CC39D45457E}"/>
-          </ac:spMkLst>
-        </pc:spChg>
-        <pc:spChg chg="add mod">
-          <ac:chgData name="Andrew Turner" userId="9b60647a-c825-4266-aafa-670849c64782" providerId="ADAL" clId="{292526B5-234E-5EAA-AFB8-0412B8CA4453}" dt="2026-06-09T13:53:36.366" v="10905" actId="1036"/>
-          <ac:spMkLst>
-            <pc:docMk/>
-            <pc:sldMk cId="4056739138" sldId="1731"/>
-            <ac:spMk id="7" creationId="{23423480-FC4D-44B8-9058-FEE8FEA08050}"/>
-          </ac:spMkLst>
-        </pc:spChg>
-        <pc:picChg chg="add mod">
-          <ac:chgData name="Andrew Turner" userId="9b60647a-c825-4266-aafa-670849c64782" providerId="ADAL" clId="{292526B5-234E-5EAA-AFB8-0412B8CA4453}" dt="2026-06-16T15:38:12.735" v="13261" actId="167"/>
-          <ac:picMkLst>
-            <pc:docMk/>
-            <pc:sldMk cId="4056739138" sldId="1731"/>
-            <ac:picMk id="8" creationId="{5BB22A17-F6B2-B296-2BB6-C748466765E8}"/>
-          </ac:picMkLst>
-        </pc:picChg>
-        <pc:picChg chg="add mod">
-          <ac:chgData name="Andrew Turner" userId="9b60647a-c825-4266-aafa-670849c64782" providerId="ADAL" clId="{292526B5-234E-5EAA-AFB8-0412B8CA4453}" dt="2026-06-16T15:38:27.273" v="13265" actId="167"/>
-          <ac:picMkLst>
-            <pc:docMk/>
-            <pc:sldMk cId="4056739138" sldId="1731"/>
-            <ac:picMk id="10" creationId="{0CECA466-CF96-2A4F-27C3-3A07C1BDFEEE}"/>
-          </ac:picMkLst>
-        </pc:picChg>
-      </pc:sldChg>
-      <pc:sldChg chg="addSp delSp modSp new mod">
-        <pc:chgData name="Andrew Turner" userId="9b60647a-c825-4266-aafa-670849c64782" providerId="ADAL" clId="{292526B5-234E-5EAA-AFB8-0412B8CA4453}" dt="2026-06-09T14:27:31.953" v="10959" actId="34807"/>
-        <pc:sldMkLst>
-          <pc:docMk/>
-          <pc:sldMk cId="2851236818" sldId="1732"/>
-        </pc:sldMkLst>
-        <pc:spChg chg="add mod">
-          <ac:chgData name="Andrew Turner" userId="9b60647a-c825-4266-aafa-670849c64782" providerId="ADAL" clId="{292526B5-234E-5EAA-AFB8-0412B8CA4453}" dt="2026-06-09T13:59:54.512" v="10951" actId="1036"/>
-          <ac:spMkLst>
-            <pc:docMk/>
-            <pc:sldMk cId="2851236818" sldId="1732"/>
-            <ac:spMk id="5" creationId="{4AC9CE6D-DCA5-D132-675C-BEF7597AC90D}"/>
-          </ac:spMkLst>
-        </pc:spChg>
-        <pc:spChg chg="add mod">
-          <ac:chgData name="Andrew Turner" userId="9b60647a-c825-4266-aafa-670849c64782" providerId="ADAL" clId="{292526B5-234E-5EAA-AFB8-0412B8CA4453}" dt="2026-06-09T13:59:54.512" v="10951" actId="1036"/>
-          <ac:spMkLst>
-            <pc:docMk/>
-            <pc:sldMk cId="2851236818" sldId="1732"/>
-            <ac:spMk id="6" creationId="{4F9FB139-33F5-45DD-1D16-1E35DA0FECE5}"/>
-          </ac:spMkLst>
-        </pc:spChg>
-        <pc:spChg chg="add mod">
-          <ac:chgData name="Andrew Turner" userId="9b60647a-c825-4266-aafa-670849c64782" providerId="ADAL" clId="{292526B5-234E-5EAA-AFB8-0412B8CA4453}" dt="2026-06-09T14:27:05.977" v="10956" actId="1076"/>
-          <ac:spMkLst>
-            <pc:docMk/>
-            <pc:sldMk cId="2851236818" sldId="1732"/>
-            <ac:spMk id="8" creationId="{570834D6-A55C-6E79-B676-0DB014D9C7C8}"/>
-          </ac:spMkLst>
-        </pc:spChg>
-        <pc:picChg chg="add mod">
-          <ac:chgData name="Andrew Turner" userId="9b60647a-c825-4266-aafa-670849c64782" providerId="ADAL" clId="{292526B5-234E-5EAA-AFB8-0412B8CA4453}" dt="2026-06-09T14:27:31.953" v="10959" actId="34807"/>
-          <ac:picMkLst>
-            <pc:docMk/>
-            <pc:sldMk cId="2851236818" sldId="1732"/>
-            <ac:picMk id="4" creationId="{2EF4A59F-20A7-D9EF-9F5C-609877582594}"/>
-          </ac:picMkLst>
-        </pc:picChg>
-      </pc:sldChg>
-      <pc:sldChg chg="delSp modSp add mod">
-        <pc:chgData name="Andrew Turner" userId="9b60647a-c825-4266-aafa-670849c64782" providerId="ADAL" clId="{292526B5-234E-5EAA-AFB8-0412B8CA4453}" dt="2026-06-16T16:54:33.972" v="14009" actId="20577"/>
+      <pc:sldChg chg="modSp mod">
+        <pc:chgData name="Andrew Turner" userId="9b60647a-c825-4266-aafa-670849c64782" providerId="ADAL" clId="{292526B5-234E-5EAA-AFB8-0412B8CA4453}" dt="2026-10-01T19:36:16.210" v="15597" actId="20577"/>
         <pc:sldMkLst>
           <pc:docMk/>
           <pc:sldMk cId="4139190702" sldId="1736"/>
         </pc:sldMkLst>
         <pc:spChg chg="mod">
-          <ac:chgData name="Andrew Turner" userId="9b60647a-c825-4266-aafa-670849c64782" providerId="ADAL" clId="{292526B5-234E-5EAA-AFB8-0412B8CA4453}" dt="2026-06-16T16:51:02.064" v="13562" actId="20577"/>
+          <ac:chgData name="Andrew Turner" userId="9b60647a-c825-4266-aafa-670849c64782" providerId="ADAL" clId="{292526B5-234E-5EAA-AFB8-0412B8CA4453}" dt="2026-10-01T19:36:09.083" v="15578" actId="20577"/>
           <ac:spMkLst>
             <pc:docMk/>
             <pc:sldMk cId="4139190702" sldId="1736"/>
@@ -1343,7 +207,7 @@
           </ac:spMkLst>
         </pc:spChg>
         <pc:spChg chg="mod">
-          <ac:chgData name="Andrew Turner" userId="9b60647a-c825-4266-aafa-670849c64782" providerId="ADAL" clId="{292526B5-234E-5EAA-AFB8-0412B8CA4453}" dt="2026-06-16T16:54:33.972" v="14009" actId="20577"/>
+          <ac:chgData name="Andrew Turner" userId="9b60647a-c825-4266-aafa-670849c64782" providerId="ADAL" clId="{292526B5-234E-5EAA-AFB8-0412B8CA4453}" dt="2026-10-01T19:36:16.210" v="15597" actId="20577"/>
           <ac:spMkLst>
             <pc:docMk/>
             <pc:sldMk cId="4139190702" sldId="1736"/>
@@ -1351,14 +215,14 @@
           </ac:spMkLst>
         </pc:spChg>
       </pc:sldChg>
-      <pc:sldChg chg="modSp add mod">
-        <pc:chgData name="Andrew Turner" userId="9b60647a-c825-4266-aafa-670849c64782" providerId="ADAL" clId="{292526B5-234E-5EAA-AFB8-0412B8CA4453}" dt="2026-06-16T16:56:25.562" v="14212" actId="20577"/>
+      <pc:sldChg chg="modSp mod">
+        <pc:chgData name="Andrew Turner" userId="9b60647a-c825-4266-aafa-670849c64782" providerId="ADAL" clId="{292526B5-234E-5EAA-AFB8-0412B8CA4453}" dt="2026-10-01T19:41:58.947" v="15742" actId="20577"/>
         <pc:sldMkLst>
           <pc:docMk/>
           <pc:sldMk cId="2965714094" sldId="1737"/>
         </pc:sldMkLst>
         <pc:spChg chg="mod">
-          <ac:chgData name="Andrew Turner" userId="9b60647a-c825-4266-aafa-670849c64782" providerId="ADAL" clId="{292526B5-234E-5EAA-AFB8-0412B8CA4453}" dt="2026-06-16T16:55:11.787" v="14041" actId="20577"/>
+          <ac:chgData name="Andrew Turner" userId="9b60647a-c825-4266-aafa-670849c64782" providerId="ADAL" clId="{292526B5-234E-5EAA-AFB8-0412B8CA4453}" dt="2026-10-01T19:41:50.802" v="15723" actId="20577"/>
           <ac:spMkLst>
             <pc:docMk/>
             <pc:sldMk cId="2965714094" sldId="1737"/>
@@ -1366,7 +230,7 @@
           </ac:spMkLst>
         </pc:spChg>
         <pc:spChg chg="mod">
-          <ac:chgData name="Andrew Turner" userId="9b60647a-c825-4266-aafa-670849c64782" providerId="ADAL" clId="{292526B5-234E-5EAA-AFB8-0412B8CA4453}" dt="2026-06-16T16:56:25.562" v="14212" actId="20577"/>
+          <ac:chgData name="Andrew Turner" userId="9b60647a-c825-4266-aafa-670849c64782" providerId="ADAL" clId="{292526B5-234E-5EAA-AFB8-0412B8CA4453}" dt="2026-10-01T19:41:58.947" v="15742" actId="20577"/>
           <ac:spMkLst>
             <pc:docMk/>
             <pc:sldMk cId="2965714094" sldId="1737"/>
@@ -1374,155 +238,120 @@
           </ac:spMkLst>
         </pc:spChg>
       </pc:sldChg>
-      <pc:sldChg chg="modSp add mod">
-        <pc:chgData name="Andrew Turner" userId="9b60647a-c825-4266-aafa-670849c64782" providerId="ADAL" clId="{292526B5-234E-5EAA-AFB8-0412B8CA4453}" dt="2026-06-16T16:57:44.161" v="14297" actId="20577"/>
+      <pc:sldChg chg="modSp mod">
+        <pc:chgData name="Andrew Turner" userId="9b60647a-c825-4266-aafa-670849c64782" providerId="ADAL" clId="{292526B5-234E-5EAA-AFB8-0412B8CA4453}" dt="2026-10-01T19:44:13.439" v="15795" actId="20577"/>
         <pc:sldMkLst>
           <pc:docMk/>
           <pc:sldMk cId="751989524" sldId="1738"/>
         </pc:sldMkLst>
         <pc:spChg chg="mod">
-          <ac:chgData name="Andrew Turner" userId="9b60647a-c825-4266-aafa-670849c64782" providerId="ADAL" clId="{292526B5-234E-5EAA-AFB8-0412B8CA4453}" dt="2026-06-16T16:56:59.848" v="14219" actId="20577"/>
+          <ac:chgData name="Andrew Turner" userId="9b60647a-c825-4266-aafa-670849c64782" providerId="ADAL" clId="{292526B5-234E-5EAA-AFB8-0412B8CA4453}" dt="2026-10-01T19:44:13.439" v="15795" actId="20577"/>
           <ac:spMkLst>
             <pc:docMk/>
             <pc:sldMk cId="751989524" sldId="1738"/>
             <ac:spMk id="2" creationId="{C376FFE2-6098-B9C3-E42E-49C79F7FB53D}"/>
           </ac:spMkLst>
         </pc:spChg>
+      </pc:sldChg>
+      <pc:sldChg chg="modSp new mod">
+        <pc:chgData name="Andrew Turner" userId="9b60647a-c825-4266-aafa-670849c64782" providerId="ADAL" clId="{292526B5-234E-5EAA-AFB8-0412B8CA4453}" dt="2026-10-01T19:38:09.894" v="15630" actId="207"/>
+        <pc:sldMkLst>
+          <pc:docMk/>
+          <pc:sldMk cId="2135178806" sldId="1739"/>
+        </pc:sldMkLst>
         <pc:spChg chg="mod">
-          <ac:chgData name="Andrew Turner" userId="9b60647a-c825-4266-aafa-670849c64782" providerId="ADAL" clId="{292526B5-234E-5EAA-AFB8-0412B8CA4453}" dt="2026-06-16T16:57:44.161" v="14297" actId="20577"/>
+          <ac:chgData name="Andrew Turner" userId="9b60647a-c825-4266-aafa-670849c64782" providerId="ADAL" clId="{292526B5-234E-5EAA-AFB8-0412B8CA4453}" dt="2026-10-01T19:38:09.894" v="15630" actId="207"/>
           <ac:spMkLst>
             <pc:docMk/>
-            <pc:sldMk cId="751989524" sldId="1738"/>
-            <ac:spMk id="3" creationId="{A592DFA5-A2CF-D926-F327-BCF78C40BA36}"/>
+            <pc:sldMk cId="2135178806" sldId="1739"/>
+            <ac:spMk id="2" creationId="{B070A525-E0EB-3A4D-5645-42A59C68DD09}"/>
+          </ac:spMkLst>
+        </pc:spChg>
+        <pc:spChg chg="mod">
+          <ac:chgData name="Andrew Turner" userId="9b60647a-c825-4266-aafa-670849c64782" providerId="ADAL" clId="{292526B5-234E-5EAA-AFB8-0412B8CA4453}" dt="2026-10-01T19:38:03.053" v="15629" actId="12"/>
+          <ac:spMkLst>
+            <pc:docMk/>
+            <pc:sldMk cId="2135178806" sldId="1739"/>
+            <ac:spMk id="3" creationId="{6D5A02FB-F45D-456B-1587-DC518C498D40}"/>
           </ac:spMkLst>
         </pc:spChg>
       </pc:sldChg>
-      <pc:sldChg chg="modSp add mod">
-        <pc:chgData name="Andrew Turner" userId="9b60647a-c825-4266-aafa-670849c64782" providerId="ADAL" clId="{292526B5-234E-5EAA-AFB8-0412B8CA4453}" dt="2026-06-16T16:59:48.887" v="14468" actId="20577"/>
+      <pc:sldChg chg="addSp modSp new mod">
+        <pc:chgData name="Andrew Turner" userId="9b60647a-c825-4266-aafa-670849c64782" providerId="ADAL" clId="{292526B5-234E-5EAA-AFB8-0412B8CA4453}" dt="2026-10-01T19:41:30.840" v="15712" actId="207"/>
         <pc:sldMkLst>
           <pc:docMk/>
-          <pc:sldMk cId="236098421" sldId="1739"/>
+          <pc:sldMk cId="185008798" sldId="1740"/>
         </pc:sldMkLst>
         <pc:spChg chg="mod">
-          <ac:chgData name="Andrew Turner" userId="9b60647a-c825-4266-aafa-670849c64782" providerId="ADAL" clId="{292526B5-234E-5EAA-AFB8-0412B8CA4453}" dt="2026-06-16T16:58:34.755" v="14305" actId="20577"/>
+          <ac:chgData name="Andrew Turner" userId="9b60647a-c825-4266-aafa-670849c64782" providerId="ADAL" clId="{292526B5-234E-5EAA-AFB8-0412B8CA4453}" dt="2026-10-01T19:41:30.840" v="15712" actId="207"/>
           <ac:spMkLst>
             <pc:docMk/>
-            <pc:sldMk cId="236098421" sldId="1739"/>
-            <ac:spMk id="2" creationId="{628C000A-18D4-B5B9-0354-8EB7E46661C2}"/>
+            <pc:sldMk cId="185008798" sldId="1740"/>
+            <ac:spMk id="2" creationId="{A6838880-BF2D-DB34-CDC1-51FAED226F38}"/>
           </ac:spMkLst>
         </pc:spChg>
         <pc:spChg chg="mod">
-          <ac:chgData name="Andrew Turner" userId="9b60647a-c825-4266-aafa-670849c64782" providerId="ADAL" clId="{292526B5-234E-5EAA-AFB8-0412B8CA4453}" dt="2026-06-16T16:59:48.887" v="14468" actId="20577"/>
+          <ac:chgData name="Andrew Turner" userId="9b60647a-c825-4266-aafa-670849c64782" providerId="ADAL" clId="{292526B5-234E-5EAA-AFB8-0412B8CA4453}" dt="2026-10-01T19:41:25.824" v="15711" actId="14100"/>
           <ac:spMkLst>
             <pc:docMk/>
-            <pc:sldMk cId="236098421" sldId="1739"/>
-            <ac:spMk id="3" creationId="{2806B35E-DC90-717F-A8A4-FA710556CD0C}"/>
+            <pc:sldMk cId="185008798" sldId="1740"/>
+            <ac:spMk id="3" creationId="{0D2A554C-C531-18AD-385C-71540A0B9547}"/>
+          </ac:spMkLst>
+        </pc:spChg>
+        <pc:spChg chg="add mod">
+          <ac:chgData name="Andrew Turner" userId="9b60647a-c825-4266-aafa-670849c64782" providerId="ADAL" clId="{292526B5-234E-5EAA-AFB8-0412B8CA4453}" dt="2026-10-01T19:41:09.306" v="15708" actId="1076"/>
+          <ac:spMkLst>
+            <pc:docMk/>
+            <pc:sldMk cId="185008798" sldId="1740"/>
+            <ac:spMk id="4" creationId="{154AF968-868F-B6CF-22C5-7C44BE522AEC}"/>
           </ac:spMkLst>
         </pc:spChg>
       </pc:sldChg>
-      <pc:sldChg chg="addSp delSp modSp new mod">
-        <pc:chgData name="Andrew Turner" userId="9b60647a-c825-4266-aafa-670849c64782" providerId="ADAL" clId="{292526B5-234E-5EAA-AFB8-0412B8CA4453}" dt="2026-06-17T09:49:50.819" v="15173" actId="1038"/>
+      <pc:sldChg chg="modSp new mod">
+        <pc:chgData name="Andrew Turner" userId="9b60647a-c825-4266-aafa-670849c64782" providerId="ADAL" clId="{292526B5-234E-5EAA-AFB8-0412B8CA4453}" dt="2026-10-01T19:43:30.391" v="15786" actId="20577"/>
         <pc:sldMkLst>
           <pc:docMk/>
-          <pc:sldMk cId="1493838822" sldId="1740"/>
+          <pc:sldMk cId="3784147056" sldId="1741"/>
         </pc:sldMkLst>
         <pc:spChg chg="mod">
-          <ac:chgData name="Andrew Turner" userId="9b60647a-c825-4266-aafa-670849c64782" providerId="ADAL" clId="{292526B5-234E-5EAA-AFB8-0412B8CA4453}" dt="2026-06-17T09:49:01.732" v="15164" actId="1035"/>
+          <ac:chgData name="Andrew Turner" userId="9b60647a-c825-4266-aafa-670849c64782" providerId="ADAL" clId="{292526B5-234E-5EAA-AFB8-0412B8CA4453}" dt="2026-10-01T19:42:49.842" v="15759" actId="207"/>
           <ac:spMkLst>
             <pc:docMk/>
-            <pc:sldMk cId="1493838822" sldId="1740"/>
-            <ac:spMk id="2" creationId="{F36CE2D3-4B18-788E-DE2C-1A79D1444056}"/>
+            <pc:sldMk cId="3784147056" sldId="1741"/>
+            <ac:spMk id="2" creationId="{A814621E-C0EE-1C9D-6938-ACBD96847E5D}"/>
           </ac:spMkLst>
         </pc:spChg>
-        <pc:spChg chg="del mod">
-          <ac:chgData name="Andrew Turner" userId="9b60647a-c825-4266-aafa-670849c64782" providerId="ADAL" clId="{292526B5-234E-5EAA-AFB8-0412B8CA4453}" dt="2026-06-17T09:48:10.060" v="15123" actId="478"/>
+        <pc:spChg chg="mod">
+          <ac:chgData name="Andrew Turner" userId="9b60647a-c825-4266-aafa-670849c64782" providerId="ADAL" clId="{292526B5-234E-5EAA-AFB8-0412B8CA4453}" dt="2026-10-01T19:43:30.391" v="15786" actId="20577"/>
           <ac:spMkLst>
             <pc:docMk/>
-            <pc:sldMk cId="1493838822" sldId="1740"/>
-            <ac:spMk id="3" creationId="{B3B4012E-20D7-CC2B-F139-445E2D4B0D81}"/>
+            <pc:sldMk cId="3784147056" sldId="1741"/>
+            <ac:spMk id="3" creationId="{167A0CF7-A9EB-EA5E-91E3-2AEF8C161A84}"/>
           </ac:spMkLst>
         </pc:spChg>
-        <pc:picChg chg="add mod">
-          <ac:chgData name="Andrew Turner" userId="9b60647a-c825-4266-aafa-670849c64782" providerId="ADAL" clId="{292526B5-234E-5EAA-AFB8-0412B8CA4453}" dt="2026-06-17T09:49:50.819" v="15173" actId="1038"/>
-          <ac:picMkLst>
-            <pc:docMk/>
-            <pc:sldMk cId="1493838822" sldId="1740"/>
-            <ac:picMk id="4" creationId="{AD19C9C2-4156-B619-CC59-A26D60D2F64E}"/>
-          </ac:picMkLst>
-        </pc:picChg>
-        <pc:picChg chg="add mod">
-          <ac:chgData name="Andrew Turner" userId="9b60647a-c825-4266-aafa-670849c64782" providerId="ADAL" clId="{292526B5-234E-5EAA-AFB8-0412B8CA4453}" dt="2026-06-17T09:48:56.547" v="15154" actId="1038"/>
-          <ac:picMkLst>
-            <pc:docMk/>
-            <pc:sldMk cId="1493838822" sldId="1740"/>
-            <ac:picMk id="5" creationId="{2E872DBF-DA76-9CFA-0502-265021FE2045}"/>
-          </ac:picMkLst>
-        </pc:picChg>
-        <pc:picChg chg="add mod">
-          <ac:chgData name="Andrew Turner" userId="9b60647a-c825-4266-aafa-670849c64782" providerId="ADAL" clId="{292526B5-234E-5EAA-AFB8-0412B8CA4453}" dt="2026-06-17T09:48:56.547" v="15154" actId="1038"/>
-          <ac:picMkLst>
-            <pc:docMk/>
-            <pc:sldMk cId="1493838822" sldId="1740"/>
-            <ac:picMk id="7" creationId="{60B95385-FFBA-CFFA-670B-51F195DAAD3D}"/>
-          </ac:picMkLst>
-        </pc:picChg>
-        <pc:picChg chg="add mod">
-          <ac:chgData name="Andrew Turner" userId="9b60647a-c825-4266-aafa-670849c64782" providerId="ADAL" clId="{292526B5-234E-5EAA-AFB8-0412B8CA4453}" dt="2026-06-17T09:48:56.547" v="15154" actId="1038"/>
-          <ac:picMkLst>
-            <pc:docMk/>
-            <pc:sldMk cId="1493838822" sldId="1740"/>
-            <ac:picMk id="8" creationId="{A723EB65-7859-E187-91B1-E444E79C2487}"/>
-          </ac:picMkLst>
-        </pc:picChg>
       </pc:sldChg>
-      <pc:sldChg chg="add del">
-        <pc:chgData name="Andrew Turner" userId="9b60647a-c825-4266-aafa-670849c64782" providerId="ADAL" clId="{292526B5-234E-5EAA-AFB8-0412B8CA4453}" dt="2026-06-18T07:49:10.024" v="15439" actId="2696"/>
+      <pc:sldChg chg="modSp new mod">
+        <pc:chgData name="Andrew Turner" userId="9b60647a-c825-4266-aafa-670849c64782" providerId="ADAL" clId="{292526B5-234E-5EAA-AFB8-0412B8CA4453}" dt="2026-10-01T19:45:33.424" v="15827" actId="207"/>
         <pc:sldMkLst>
           <pc:docMk/>
-          <pc:sldMk cId="2548529128" sldId="1741"/>
+          <pc:sldMk cId="1804721935" sldId="1742"/>
         </pc:sldMkLst>
-      </pc:sldChg>
-      <pc:sldChg chg="add">
-        <pc:chgData name="Andrew Turner" userId="9b60647a-c825-4266-aafa-670849c64782" providerId="ADAL" clId="{292526B5-234E-5EAA-AFB8-0412B8CA4453}" dt="2026-06-18T07:48:29.433" v="15398"/>
-        <pc:sldMkLst>
-          <pc:docMk/>
-          <pc:sldMk cId="1336928419" sldId="1742"/>
-        </pc:sldMkLst>
-      </pc:sldChg>
-      <pc:sldChg chg="add">
-        <pc:chgData name="Andrew Turner" userId="9b60647a-c825-4266-aafa-670849c64782" providerId="ADAL" clId="{292526B5-234E-5EAA-AFB8-0412B8CA4453}" dt="2026-06-18T07:48:29.433" v="15398"/>
-        <pc:sldMkLst>
-          <pc:docMk/>
-          <pc:sldMk cId="2205958413" sldId="1743"/>
-        </pc:sldMkLst>
-      </pc:sldChg>
-      <pc:sldChg chg="add">
-        <pc:chgData name="Andrew Turner" userId="9b60647a-c825-4266-aafa-670849c64782" providerId="ADAL" clId="{292526B5-234E-5EAA-AFB8-0412B8CA4453}" dt="2026-06-18T07:48:29.433" v="15398"/>
-        <pc:sldMkLst>
-          <pc:docMk/>
-          <pc:sldMk cId="0" sldId="1744"/>
-        </pc:sldMkLst>
-      </pc:sldChg>
-      <pc:sldChg chg="add">
-        <pc:chgData name="Andrew Turner" userId="9b60647a-c825-4266-aafa-670849c64782" providerId="ADAL" clId="{292526B5-234E-5EAA-AFB8-0412B8CA4453}" dt="2026-06-18T07:48:29.433" v="15398"/>
-        <pc:sldMkLst>
-          <pc:docMk/>
-          <pc:sldMk cId="777447343" sldId="1745"/>
-        </pc:sldMkLst>
-      </pc:sldChg>
-      <pc:sldChg chg="add">
-        <pc:chgData name="Andrew Turner" userId="9b60647a-c825-4266-aafa-670849c64782" providerId="ADAL" clId="{292526B5-234E-5EAA-AFB8-0412B8CA4453}" dt="2026-06-18T07:48:29.433" v="15398"/>
-        <pc:sldMkLst>
-          <pc:docMk/>
-          <pc:sldMk cId="158425672" sldId="1746"/>
-        </pc:sldMkLst>
-      </pc:sldChg>
-      <pc:sldChg chg="add del">
-        <pc:chgData name="Andrew Turner" userId="9b60647a-c825-4266-aafa-670849c64782" providerId="ADAL" clId="{292526B5-234E-5EAA-AFB8-0412B8CA4453}" dt="2026-06-18T07:51:19.752" v="15446" actId="2696"/>
-        <pc:sldMkLst>
-          <pc:docMk/>
-          <pc:sldMk cId="3317533919" sldId="1747"/>
-        </pc:sldMkLst>
+        <pc:spChg chg="mod">
+          <ac:chgData name="Andrew Turner" userId="9b60647a-c825-4266-aafa-670849c64782" providerId="ADAL" clId="{292526B5-234E-5EAA-AFB8-0412B8CA4453}" dt="2026-10-01T19:45:33.424" v="15827" actId="207"/>
+          <ac:spMkLst>
+            <pc:docMk/>
+            <pc:sldMk cId="1804721935" sldId="1742"/>
+            <ac:spMk id="2" creationId="{28532997-ABBC-4FA1-59E0-F1CCC3E956D4}"/>
+          </ac:spMkLst>
+        </pc:spChg>
+        <pc:spChg chg="mod">
+          <ac:chgData name="Andrew Turner" userId="9b60647a-c825-4266-aafa-670849c64782" providerId="ADAL" clId="{292526B5-234E-5EAA-AFB8-0412B8CA4453}" dt="2026-10-01T19:45:10.522" v="15826" actId="20577"/>
+          <ac:spMkLst>
+            <pc:docMk/>
+            <pc:sldMk cId="1804721935" sldId="1742"/>
+            <ac:spMk id="3" creationId="{B12508BB-7999-B883-BEFF-B84C6CF69252}"/>
+          </ac:spMkLst>
+        </pc:spChg>
       </pc:sldChg>
     </pc:docChg>
   </pc:docChgLst>
@@ -6387,7 +5216,7 @@
       <dgm:spPr/>
     </dgm:pt>
     <dgm:pt modelId="{C2316286-00DF-44D6-BB6E-3A17A8E6D2D7}" type="pres">
-      <dgm:prSet presAssocID="{3343B7A6-807A-4B50-A4F0-2A1328A207AB}" presName="bgRect" presStyleLbl="bgShp" presStyleIdx="0" presStyleCnt="3"/>
+      <dgm:prSet presAssocID="{3343B7A6-807A-4B50-A4F0-2A1328A207AB}" presName="bgRect" presStyleLbl="bgShp" presStyleIdx="0" presStyleCnt="3" custLinFactNeighborX="121" custLinFactNeighborY="-29597"/>
       <dgm:spPr/>
     </dgm:pt>
     <dgm:pt modelId="{625E67C6-3553-4279-A60C-05B9DB308E6C}" type="pres">
@@ -9216,7 +8045,7 @@
       </dsp:nvSpPr>
       <dsp:spPr>
         <a:xfrm>
-          <a:off x="0" y="1642"/>
+          <a:off x="0" y="0"/>
           <a:ext cx="9846130" cy="767889"/>
         </a:xfrm>
         <a:prstGeom prst="roundRect">
@@ -18219,7 +17048,7 @@
           <a:p>
             <a:fld id="{022D67AD-8DAF-A541-B35E-CB502AEA06D5}" type="datetimeFigureOut">
               <a:rPr lang="en-GB" smtClean="0"/>
-              <a:t>14/09/2026</a:t>
+              <a:t>01/10/2026</a:t>
             </a:fld>
             <a:endParaRPr lang="en-GB"/>
           </a:p>
@@ -18633,7 +17462,7 @@
           <a:p>
             <a:fld id="{5C71754A-319A-8245-9AA4-B46082C5A76D}" type="datetimeFigureOut">
               <a:rPr lang="en-GB" smtClean="0"/>
-              <a:t>14/09/2026</a:t>
+              <a:t>01/10/2026</a:t>
             </a:fld>
             <a:endParaRPr lang="en-GB"/>
           </a:p>
@@ -18831,7 +17660,7 @@
           <a:p>
             <a:fld id="{5C71754A-319A-8245-9AA4-B46082C5A76D}" type="datetimeFigureOut">
               <a:rPr lang="en-GB" smtClean="0"/>
-              <a:t>14/09/2026</a:t>
+              <a:t>01/10/2026</a:t>
             </a:fld>
             <a:endParaRPr lang="en-GB"/>
           </a:p>
@@ -19039,7 +17868,7 @@
           <a:p>
             <a:fld id="{5C71754A-319A-8245-9AA4-B46082C5A76D}" type="datetimeFigureOut">
               <a:rPr lang="en-GB" smtClean="0"/>
-              <a:t>14/09/2026</a:t>
+              <a:t>01/10/2026</a:t>
             </a:fld>
             <a:endParaRPr lang="en-GB"/>
           </a:p>
@@ -19596,7 +18425,7 @@
           <a:p>
             <a:fld id="{5C71754A-319A-8245-9AA4-B46082C5A76D}" type="datetimeFigureOut">
               <a:rPr lang="en-GB" smtClean="0"/>
-              <a:t>14/09/2026</a:t>
+              <a:t>01/10/2026</a:t>
             </a:fld>
             <a:endParaRPr lang="en-GB"/>
           </a:p>
@@ -19871,7 +18700,7 @@
           <a:p>
             <a:fld id="{5C71754A-319A-8245-9AA4-B46082C5A76D}" type="datetimeFigureOut">
               <a:rPr lang="en-GB" smtClean="0"/>
-              <a:t>14/09/2026</a:t>
+              <a:t>01/10/2026</a:t>
             </a:fld>
             <a:endParaRPr lang="en-GB"/>
           </a:p>
@@ -20136,7 +18965,7 @@
           <a:p>
             <a:fld id="{5C71754A-319A-8245-9AA4-B46082C5A76D}" type="datetimeFigureOut">
               <a:rPr lang="en-GB" smtClean="0"/>
-              <a:t>14/09/2026</a:t>
+              <a:t>01/10/2026</a:t>
             </a:fld>
             <a:endParaRPr lang="en-GB"/>
           </a:p>
@@ -20548,7 +19377,7 @@
           <a:p>
             <a:fld id="{5C71754A-319A-8245-9AA4-B46082C5A76D}" type="datetimeFigureOut">
               <a:rPr lang="en-GB" smtClean="0"/>
-              <a:t>14/09/2026</a:t>
+              <a:t>01/10/2026</a:t>
             </a:fld>
             <a:endParaRPr lang="en-GB"/>
           </a:p>
@@ -20689,7 +19518,7 @@
           <a:p>
             <a:fld id="{5C71754A-319A-8245-9AA4-B46082C5A76D}" type="datetimeFigureOut">
               <a:rPr lang="en-GB" smtClean="0"/>
-              <a:t>14/09/2026</a:t>
+              <a:t>01/10/2026</a:t>
             </a:fld>
             <a:endParaRPr lang="en-GB"/>
           </a:p>
@@ -20802,7 +19631,7 @@
           <a:p>
             <a:fld id="{5C71754A-319A-8245-9AA4-B46082C5A76D}" type="datetimeFigureOut">
               <a:rPr lang="en-GB" smtClean="0"/>
-              <a:t>14/09/2026</a:t>
+              <a:t>01/10/2026</a:t>
             </a:fld>
             <a:endParaRPr lang="en-GB"/>
           </a:p>
@@ -21113,7 +19942,7 @@
           <a:p>
             <a:fld id="{5C71754A-319A-8245-9AA4-B46082C5A76D}" type="datetimeFigureOut">
               <a:rPr lang="en-GB" smtClean="0"/>
-              <a:t>14/09/2026</a:t>
+              <a:t>01/10/2026</a:t>
             </a:fld>
             <a:endParaRPr lang="en-GB"/>
           </a:p>
@@ -21401,7 +20230,7 @@
           <a:p>
             <a:fld id="{5C71754A-319A-8245-9AA4-B46082C5A76D}" type="datetimeFigureOut">
               <a:rPr lang="en-GB" smtClean="0"/>
-              <a:t>14/09/2026</a:t>
+              <a:t>01/10/2026</a:t>
             </a:fld>
             <a:endParaRPr lang="en-GB"/>
           </a:p>
@@ -21645,7 +20474,7 @@
           <a:p>
             <a:fld id="{5C71754A-319A-8245-9AA4-B46082C5A76D}" type="datetimeFigureOut">
               <a:rPr lang="en-GB" smtClean="0"/>
-              <a:t>14/09/2026</a:t>
+              <a:t>01/10/2026</a:t>
             </a:fld>
             <a:endParaRPr lang="en-GB"/>
           </a:p>
@@ -22161,6 +20990,130 @@
       </p:grpSpPr>
       <p:sp>
         <p:nvSpPr>
+          <p:cNvPr id="2" name="Title 1">
+            <a:extLst>
+              <a:ext uri="{FF2B5EF4-FFF2-40B4-BE49-F238E27FC236}">
+                <a16:creationId xmlns:a16="http://schemas.microsoft.com/office/drawing/2014/main" id="{2D83EF74-FBA6-F104-45D2-3277B29A1BD9}"/>
+              </a:ext>
+            </a:extLst>
+          </p:cNvPr>
+          <p:cNvSpPr>
+            <a:spLocks noGrp="1"/>
+          </p:cNvSpPr>
+          <p:nvPr>
+            <p:ph type="title"/>
+          </p:nvPr>
+        </p:nvSpPr>
+        <p:spPr/>
+        <p:txBody>
+          <a:bodyPr/>
+          <a:lstStyle/>
+          <a:p>
+            <a:r>
+              <a:rPr lang="en-GB" dirty="0"/>
+              <a:t>Planning: points to consider</a:t>
+            </a:r>
+          </a:p>
+        </p:txBody>
+      </p:sp>
+      <p:graphicFrame>
+        <p:nvGraphicFramePr>
+          <p:cNvPr id="6" name="Content Placeholder 5">
+            <a:extLst>
+              <a:ext uri="{FF2B5EF4-FFF2-40B4-BE49-F238E27FC236}">
+                <a16:creationId xmlns:a16="http://schemas.microsoft.com/office/drawing/2014/main" id="{29E5274F-8188-4662-5A12-AC3FC5FC9FB4}"/>
+              </a:ext>
+            </a:extLst>
+          </p:cNvPr>
+          <p:cNvGraphicFramePr>
+            <a:graphicFrameLocks noGrp="1"/>
+          </p:cNvGraphicFramePr>
+          <p:nvPr>
+            <p:ph idx="1"/>
+            <p:extLst>
+              <p:ext uri="{D42A27DB-BD31-4B8C-83A1-F6EECF244321}">
+                <p14:modId xmlns:p14="http://schemas.microsoft.com/office/powerpoint/2010/main" val="1789848179"/>
+              </p:ext>
+            </p:extLst>
+          </p:nvPr>
+        </p:nvGraphicFramePr>
+        <p:xfrm>
+          <a:off x="838200" y="2646948"/>
+          <a:ext cx="10515600" cy="3850858"/>
+        </p:xfrm>
+        <a:graphic>
+          <a:graphicData uri="http://schemas.openxmlformats.org/drawingml/2006/diagram">
+            <dgm:relIds xmlns:dgm="http://schemas.openxmlformats.org/drawingml/2006/diagram" xmlns:r="http://schemas.openxmlformats.org/officeDocument/2006/relationships" r:dm="rId2" r:lo="rId3" r:qs="rId4" r:cs="rId5"/>
+          </a:graphicData>
+        </a:graphic>
+      </p:graphicFrame>
+      <p:sp>
+        <p:nvSpPr>
+          <p:cNvPr id="7" name="TextBox 6">
+            <a:extLst>
+              <a:ext uri="{FF2B5EF4-FFF2-40B4-BE49-F238E27FC236}">
+                <a16:creationId xmlns:a16="http://schemas.microsoft.com/office/drawing/2014/main" id="{10850F01-805C-AB1A-A4A8-01D1C15C30CE}"/>
+              </a:ext>
+            </a:extLst>
+          </p:cNvPr>
+          <p:cNvSpPr txBox="1"/>
+          <p:nvPr/>
+        </p:nvSpPr>
+        <p:spPr>
+          <a:xfrm>
+            <a:off x="838200" y="1474526"/>
+            <a:ext cx="10515600" cy="1015663"/>
+          </a:xfrm>
+          <a:prstGeom prst="rect">
+            <a:avLst/>
+          </a:prstGeom>
+          <a:noFill/>
+        </p:spPr>
+        <p:txBody>
+          <a:bodyPr wrap="square" rtlCol="0">
+            <a:spAutoFit/>
+          </a:bodyPr>
+          <a:lstStyle/>
+          <a:p>
+            <a:r>
+              <a:rPr lang="en-GB" sz="2000" i="1" dirty="0"/>
+              <a:t>Planning the project with environmental sustainability in mind is typically the time when you can have the largest impact. Planning to run the project in a responsible way almost always makes the project more impactful and robust from a non-environmental standpoint too. </a:t>
+            </a:r>
+          </a:p>
+        </p:txBody>
+      </p:sp>
+    </p:spTree>
+    <p:extLst>
+      <p:ext uri="{BB962C8B-B14F-4D97-AF65-F5344CB8AC3E}">
+        <p14:creationId xmlns:p14="http://schemas.microsoft.com/office/powerpoint/2010/main" val="2908258310"/>
+      </p:ext>
+    </p:extLst>
+  </p:cSld>
+  <p:clrMapOvr>
+    <a:masterClrMapping/>
+  </p:clrMapOvr>
+</p:sld>
+</file>
+
+<file path=ppt/slides/slide11.xml><?xml version="1.0" encoding="utf-8"?>
+<p:sld xmlns:a="http://schemas.openxmlformats.org/drawingml/2006/main" xmlns:r="http://schemas.openxmlformats.org/officeDocument/2006/relationships" xmlns:p="http://schemas.openxmlformats.org/presentationml/2006/main">
+  <p:cSld>
+    <p:spTree>
+      <p:nvGrpSpPr>
+        <p:cNvPr id="1" name=""/>
+        <p:cNvGrpSpPr/>
+        <p:nvPr/>
+      </p:nvGrpSpPr>
+      <p:grpSpPr>
+        <a:xfrm>
+          <a:off x="0" y="0"/>
+          <a:ext cx="0" cy="0"/>
+          <a:chOff x="0" y="0"/>
+          <a:chExt cx="0" cy="0"/>
+        </a:xfrm>
+      </p:grpSpPr>
+      <p:sp>
+        <p:nvSpPr>
           <p:cNvPr id="3" name="Content Placeholder 2">
             <a:extLst>
               <a:ext uri="{FF2B5EF4-FFF2-40B4-BE49-F238E27FC236}">
@@ -22426,7 +21379,7 @@
 </p:sld>
 </file>
 
-<file path=ppt/slides/slide11.xml><?xml version="1.0" encoding="utf-8"?>
+<file path=ppt/slides/slide12.xml><?xml version="1.0" encoding="utf-8"?>
 <p:sld xmlns:a="http://schemas.openxmlformats.org/drawingml/2006/main" xmlns:r="http://schemas.openxmlformats.org/officeDocument/2006/relationships" xmlns:p="http://schemas.openxmlformats.org/presentationml/2006/main">
   <p:cSld>
     <p:spTree>
@@ -22693,7 +21646,7 @@
 </p:sld>
 </file>
 
-<file path=ppt/slides/slide12.xml><?xml version="1.0" encoding="utf-8"?>
+<file path=ppt/slides/slide13.xml><?xml version="1.0" encoding="utf-8"?>
 <p:sld xmlns:a="http://schemas.openxmlformats.org/drawingml/2006/main" xmlns:r="http://schemas.openxmlformats.org/officeDocument/2006/relationships" xmlns:p="http://schemas.openxmlformats.org/presentationml/2006/main">
   <p:cSld>
     <p:spTree>
@@ -22951,7 +21904,7 @@
 </p:sld>
 </file>
 
-<file path=ppt/slides/slide13.xml><?xml version="1.0" encoding="utf-8"?>
+<file path=ppt/slides/slide14.xml><?xml version="1.0" encoding="utf-8"?>
 <p:sld xmlns:a="http://schemas.openxmlformats.org/drawingml/2006/main" xmlns:r="http://schemas.openxmlformats.org/officeDocument/2006/relationships" xmlns:p="http://schemas.openxmlformats.org/presentationml/2006/main">
   <p:cSld>
     <p:spTree>
@@ -23001,7 +21954,7 @@
                   <a:schemeClr val="accent3"/>
                 </a:solidFill>
               </a:rPr>
-              <a:t>Exercise #2: 10 minutes</a:t>
+              <a:t>Challenge</a:t>
             </a:r>
           </a:p>
         </p:txBody>
@@ -23037,7 +21990,7 @@
             </a:pPr>
             <a:r>
               <a:rPr lang="en-GB" dirty="0"/>
-              <a:t>For the same project you worked on in exercise #1:</a:t>
+              <a:t>For the same project you worked on in the first challenge:</a:t>
             </a:r>
           </a:p>
           <a:p>
@@ -23097,7 +22050,258 @@
 </p:sld>
 </file>
 
-<file path=ppt/slides/slide14.xml><?xml version="1.0" encoding="utf-8"?>
+<file path=ppt/slides/slide15.xml><?xml version="1.0" encoding="utf-8"?>
+<p:sld xmlns:a="http://schemas.openxmlformats.org/drawingml/2006/main" xmlns:r="http://schemas.openxmlformats.org/officeDocument/2006/relationships" xmlns:p="http://schemas.openxmlformats.org/presentationml/2006/main">
+  <p:cSld>
+    <p:spTree>
+      <p:nvGrpSpPr>
+        <p:cNvPr id="1" name=""/>
+        <p:cNvGrpSpPr/>
+        <p:nvPr/>
+      </p:nvGrpSpPr>
+      <p:grpSpPr>
+        <a:xfrm>
+          <a:off x="0" y="0"/>
+          <a:ext cx="0" cy="0"/>
+          <a:chOff x="0" y="0"/>
+          <a:chExt cx="0" cy="0"/>
+        </a:xfrm>
+      </p:grpSpPr>
+      <p:sp>
+        <p:nvSpPr>
+          <p:cNvPr id="2" name="Title 1">
+            <a:extLst>
+              <a:ext uri="{FF2B5EF4-FFF2-40B4-BE49-F238E27FC236}">
+                <a16:creationId xmlns:a16="http://schemas.microsoft.com/office/drawing/2014/main" id="{A6838880-BF2D-DB34-CDC1-51FAED226F38}"/>
+              </a:ext>
+            </a:extLst>
+          </p:cNvPr>
+          <p:cNvSpPr>
+            <a:spLocks noGrp="1"/>
+          </p:cNvSpPr>
+          <p:nvPr>
+            <p:ph type="title"/>
+          </p:nvPr>
+        </p:nvSpPr>
+        <p:spPr/>
+        <p:txBody>
+          <a:bodyPr/>
+          <a:lstStyle/>
+          <a:p>
+            <a:r>
+              <a:rPr lang="en-GB" dirty="0">
+                <a:solidFill>
+                  <a:schemeClr val="accent3">
+                    <a:lumMod val="75000"/>
+                  </a:schemeClr>
+                </a:solidFill>
+              </a:rPr>
+              <a:t>Solution</a:t>
+            </a:r>
+          </a:p>
+        </p:txBody>
+      </p:sp>
+      <p:sp>
+        <p:nvSpPr>
+          <p:cNvPr id="3" name="Content Placeholder 2">
+            <a:extLst>
+              <a:ext uri="{FF2B5EF4-FFF2-40B4-BE49-F238E27FC236}">
+                <a16:creationId xmlns:a16="http://schemas.microsoft.com/office/drawing/2014/main" id="{0D2A554C-C531-18AD-385C-71540A0B9547}"/>
+              </a:ext>
+            </a:extLst>
+          </p:cNvPr>
+          <p:cNvSpPr>
+            <a:spLocks noGrp="1"/>
+          </p:cNvSpPr>
+          <p:nvPr>
+            <p:ph idx="1"/>
+          </p:nvPr>
+        </p:nvSpPr>
+        <p:spPr>
+          <a:xfrm>
+            <a:off x="838200" y="1350612"/>
+            <a:ext cx="4873831" cy="5142263"/>
+          </a:xfrm>
+        </p:spPr>
+        <p:txBody>
+          <a:bodyPr>
+            <a:noAutofit/>
+          </a:bodyPr>
+          <a:lstStyle/>
+          <a:p>
+            <a:pPr marL="0" indent="0">
+              <a:buNone/>
+            </a:pPr>
+            <a:r>
+              <a:rPr lang="en-GB" sz="1600" b="1" dirty="0"/>
+              <a:t>Minimise resource use:</a:t>
+            </a:r>
+            <a:endParaRPr lang="en-GB" sz="1600" dirty="0"/>
+          </a:p>
+          <a:p>
+            <a:r>
+              <a:rPr lang="en-GB" sz="1600" dirty="0"/>
+              <a:t>Search for and use existing datasets where possible</a:t>
+            </a:r>
+          </a:p>
+          <a:p>
+            <a:r>
+              <a:rPr lang="en-GB" sz="1600" dirty="0"/>
+              <a:t>Reduce sampling frequency in regions of little change</a:t>
+            </a:r>
+          </a:p>
+          <a:p>
+            <a:r>
+              <a:rPr lang="en-GB" sz="1600" dirty="0"/>
+              <a:t>Use the minimum number of compute nodes that give acceptable turnaround time</a:t>
+            </a:r>
+          </a:p>
+          <a:p>
+            <a:r>
+              <a:rPr lang="en-GB" sz="1600" dirty="0"/>
+              <a:t>Plan to delete intermediate files that are not needed</a:t>
+            </a:r>
+            <a:endParaRPr lang="en-GB" sz="1600" b="1" dirty="0"/>
+          </a:p>
+          <a:p>
+            <a:pPr marL="0" indent="0">
+              <a:buNone/>
+            </a:pPr>
+            <a:r>
+              <a:rPr lang="en-GB" sz="1600" b="1" dirty="0"/>
+              <a:t>Build testing into the project approach:</a:t>
+            </a:r>
+            <a:endParaRPr lang="en-GB" sz="1600" dirty="0"/>
+          </a:p>
+          <a:p>
+            <a:r>
+              <a:rPr lang="en-GB" sz="1600" dirty="0"/>
+              <a:t>Run pilot studies with reduced datasets</a:t>
+            </a:r>
+          </a:p>
+          <a:p>
+            <a:r>
+              <a:rPr lang="en-GB" sz="1600" dirty="0"/>
+              <a:t>Test methodology on smaller problems before scaling up</a:t>
+            </a:r>
+          </a:p>
+          <a:p>
+            <a:r>
+              <a:rPr lang="en-GB" sz="1600" dirty="0"/>
+              <a:t>Schedule regular reviews to assess if resource use is justified</a:t>
+            </a:r>
+          </a:p>
+          <a:p>
+            <a:r>
+              <a:rPr lang="en-GB" sz="1600" dirty="0"/>
+              <a:t>Benchmark different approaches to find the most efficient</a:t>
+            </a:r>
+            <a:br>
+              <a:rPr lang="en-GB" sz="1600" dirty="0"/>
+            </a:br>
+            <a:endParaRPr lang="en-GB" sz="1600" dirty="0"/>
+          </a:p>
+          <a:p>
+            <a:pPr marL="0" indent="0">
+              <a:buNone/>
+            </a:pPr>
+            <a:endParaRPr lang="en-GB" sz="1600" dirty="0"/>
+          </a:p>
+        </p:txBody>
+      </p:sp>
+      <p:sp>
+        <p:nvSpPr>
+          <p:cNvPr id="4" name="TextBox 3">
+            <a:extLst>
+              <a:ext uri="{FF2B5EF4-FFF2-40B4-BE49-F238E27FC236}">
+                <a16:creationId xmlns:a16="http://schemas.microsoft.com/office/drawing/2014/main" id="{154AF968-868F-B6CF-22C5-7C44BE522AEC}"/>
+              </a:ext>
+            </a:extLst>
+          </p:cNvPr>
+          <p:cNvSpPr txBox="1"/>
+          <p:nvPr/>
+        </p:nvSpPr>
+        <p:spPr>
+          <a:xfrm>
+            <a:off x="6096000" y="1350612"/>
+            <a:ext cx="5767449" cy="2308324"/>
+          </a:xfrm>
+          <a:prstGeom prst="rect">
+            <a:avLst/>
+          </a:prstGeom>
+          <a:noFill/>
+        </p:spPr>
+        <p:txBody>
+          <a:bodyPr wrap="square" rtlCol="0">
+            <a:spAutoFit/>
+          </a:bodyPr>
+          <a:lstStyle/>
+          <a:p>
+            <a:r>
+              <a:rPr lang="en-GB" sz="1600" b="1" dirty="0"/>
+              <a:t>Select appropriate methods and scales:</a:t>
+            </a:r>
+            <a:endParaRPr lang="en-GB" sz="1600" dirty="0"/>
+          </a:p>
+          <a:p>
+            <a:pPr marL="285750" indent="-285750">
+              <a:buFont typeface="Arial" panose="020B0604020202020204" pitchFamily="34" charset="0"/>
+              <a:buChar char="•"/>
+            </a:pPr>
+            <a:r>
+              <a:rPr lang="en-GB" sz="1600" dirty="0"/>
+              <a:t>Choose simpler methods where they are sufficient for the objectives</a:t>
+            </a:r>
+          </a:p>
+          <a:p>
+            <a:pPr marL="285750" indent="-285750">
+              <a:buFont typeface="Arial" panose="020B0604020202020204" pitchFamily="34" charset="0"/>
+              <a:buChar char="•"/>
+            </a:pPr>
+            <a:r>
+              <a:rPr lang="en-GB" sz="1600" dirty="0"/>
+              <a:t>Avoid unnecessary high-resolution calculations</a:t>
+            </a:r>
+          </a:p>
+          <a:p>
+            <a:pPr marL="285750" indent="-285750">
+              <a:buFont typeface="Arial" panose="020B0604020202020204" pitchFamily="34" charset="0"/>
+              <a:buChar char="•"/>
+            </a:pPr>
+            <a:r>
+              <a:rPr lang="en-GB" sz="1600" dirty="0"/>
+              <a:t>Plan benchmarking to determine optimal resource allocation</a:t>
+            </a:r>
+          </a:p>
+          <a:p>
+            <a:pPr marL="285750" indent="-285750">
+              <a:buFont typeface="Arial" panose="020B0604020202020204" pitchFamily="34" charset="0"/>
+              <a:buChar char="•"/>
+            </a:pPr>
+            <a:r>
+              <a:rPr lang="en-GB" sz="1600" dirty="0"/>
+              <a:t>Consider whether machine learning approaches justify their computational cost</a:t>
+            </a:r>
+          </a:p>
+          <a:p>
+            <a:endParaRPr lang="en-GB" sz="1600" dirty="0"/>
+          </a:p>
+        </p:txBody>
+      </p:sp>
+    </p:spTree>
+    <p:extLst>
+      <p:ext uri="{BB962C8B-B14F-4D97-AF65-F5344CB8AC3E}">
+        <p14:creationId xmlns:p14="http://schemas.microsoft.com/office/powerpoint/2010/main" val="185008798"/>
+      </p:ext>
+    </p:extLst>
+  </p:cSld>
+  <p:clrMapOvr>
+    <a:masterClrMapping/>
+  </p:clrMapOvr>
+</p:sld>
+</file>
+
+<file path=ppt/slides/slide16.xml><?xml version="1.0" encoding="utf-8"?>
 <p:sld xmlns:a="http://schemas.openxmlformats.org/drawingml/2006/main" xmlns:r="http://schemas.openxmlformats.org/officeDocument/2006/relationships" xmlns:p="http://schemas.openxmlformats.org/presentationml/2006/main">
   <p:cSld>
     <p:spTree>
@@ -23382,7 +22586,7 @@
 </p:sld>
 </file>
 
-<file path=ppt/slides/slide15.xml><?xml version="1.0" encoding="utf-8"?>
+<file path=ppt/slides/slide17.xml><?xml version="1.0" encoding="utf-8"?>
 <p:sld xmlns:a="http://schemas.openxmlformats.org/drawingml/2006/main" xmlns:r="http://schemas.openxmlformats.org/officeDocument/2006/relationships" xmlns:p="http://schemas.openxmlformats.org/presentationml/2006/main">
   <p:cSld>
     <p:spTree>
@@ -23649,7 +22853,7 @@
 </p:sld>
 </file>
 
-<file path=ppt/slides/slide16.xml><?xml version="1.0" encoding="utf-8"?>
+<file path=ppt/slides/slide18.xml><?xml version="1.0" encoding="utf-8"?>
 <p:sld xmlns:a="http://schemas.openxmlformats.org/drawingml/2006/main" xmlns:r="http://schemas.openxmlformats.org/officeDocument/2006/relationships" xmlns:p="http://schemas.openxmlformats.org/presentationml/2006/main">
   <p:cSld>
     <p:spTree>
@@ -23907,7 +23111,7 @@
 </p:sld>
 </file>
 
-<file path=ppt/slides/slide17.xml><?xml version="1.0" encoding="utf-8"?>
+<file path=ppt/slides/slide19.xml><?xml version="1.0" encoding="utf-8"?>
 <p:sld xmlns:a="http://schemas.openxmlformats.org/drawingml/2006/main" xmlns:r="http://schemas.openxmlformats.org/officeDocument/2006/relationships" xmlns:p="http://schemas.openxmlformats.org/presentationml/2006/main">
   <p:cSld>
     <p:spTree>
@@ -23957,7 +23161,7 @@
                   <a:schemeClr val="accent3"/>
                 </a:solidFill>
               </a:rPr>
-              <a:t>Exercise #3: 10 minutes</a:t>
+              <a:t>Challenge</a:t>
             </a:r>
           </a:p>
         </p:txBody>
@@ -23993,7 +23197,7 @@
             </a:pPr>
             <a:r>
               <a:rPr lang="en-GB" dirty="0"/>
-              <a:t>For the same project you worked on in previous exercises:</a:t>
+              <a:t>For the same project you worked on in previous challenges:</a:t>
             </a:r>
           </a:p>
           <a:p>
@@ -24042,259 +23246,6 @@
     <p:extLst>
       <p:ext uri="{BB962C8B-B14F-4D97-AF65-F5344CB8AC3E}">
         <p14:creationId xmlns:p14="http://schemas.microsoft.com/office/powerpoint/2010/main" val="2965714094"/>
-      </p:ext>
-    </p:extLst>
-  </p:cSld>
-  <p:clrMapOvr>
-    <a:masterClrMapping/>
-  </p:clrMapOvr>
-</p:sld>
-</file>
-
-<file path=ppt/slides/slide18.xml><?xml version="1.0" encoding="utf-8"?>
-<p:sld xmlns:a="http://schemas.openxmlformats.org/drawingml/2006/main" xmlns:r="http://schemas.openxmlformats.org/officeDocument/2006/relationships" xmlns:p="http://schemas.openxmlformats.org/presentationml/2006/main">
-  <p:cSld>
-    <p:spTree>
-      <p:nvGrpSpPr>
-        <p:cNvPr id="1" name=""/>
-        <p:cNvGrpSpPr/>
-        <p:nvPr/>
-      </p:nvGrpSpPr>
-      <p:grpSpPr>
-        <a:xfrm>
-          <a:off x="0" y="0"/>
-          <a:ext cx="0" cy="0"/>
-          <a:chOff x="0" y="0"/>
-          <a:chExt cx="0" cy="0"/>
-        </a:xfrm>
-      </p:grpSpPr>
-      <p:sp>
-        <p:nvSpPr>
-          <p:cNvPr id="2" name="Title 1">
-            <a:extLst>
-              <a:ext uri="{FF2B5EF4-FFF2-40B4-BE49-F238E27FC236}">
-                <a16:creationId xmlns:a16="http://schemas.microsoft.com/office/drawing/2014/main" id="{E15F16C5-32AA-33D1-E25B-B891FF9A206E}"/>
-              </a:ext>
-            </a:extLst>
-          </p:cNvPr>
-          <p:cNvSpPr>
-            <a:spLocks noGrp="1"/>
-          </p:cNvSpPr>
-          <p:nvPr>
-            <p:ph type="title"/>
-          </p:nvPr>
-        </p:nvSpPr>
-        <p:spPr/>
-        <p:txBody>
-          <a:bodyPr/>
-          <a:lstStyle/>
-          <a:p>
-            <a:r>
-              <a:rPr lang="en-GB" dirty="0"/>
-              <a:t>3. Running the project </a:t>
-            </a:r>
-          </a:p>
-        </p:txBody>
-      </p:sp>
-      <p:sp>
-        <p:nvSpPr>
-          <p:cNvPr id="3" name="Text Placeholder 2">
-            <a:extLst>
-              <a:ext uri="{FF2B5EF4-FFF2-40B4-BE49-F238E27FC236}">
-                <a16:creationId xmlns:a16="http://schemas.microsoft.com/office/drawing/2014/main" id="{906A5AEE-B17A-1F2B-0815-3465F88B06C8}"/>
-              </a:ext>
-            </a:extLst>
-          </p:cNvPr>
-          <p:cNvSpPr>
-            <a:spLocks noGrp="1"/>
-          </p:cNvSpPr>
-          <p:nvPr>
-            <p:ph type="body" idx="1"/>
-          </p:nvPr>
-        </p:nvSpPr>
-        <p:spPr/>
-        <p:txBody>
-          <a:bodyPr/>
-          <a:lstStyle/>
-          <a:p>
-            <a:endParaRPr lang="en-GB"/>
-          </a:p>
-        </p:txBody>
-      </p:sp>
-    </p:spTree>
-    <p:extLst>
-      <p:ext uri="{BB962C8B-B14F-4D97-AF65-F5344CB8AC3E}">
-        <p14:creationId xmlns:p14="http://schemas.microsoft.com/office/powerpoint/2010/main" val="2182465690"/>
-      </p:ext>
-    </p:extLst>
-  </p:cSld>
-  <p:clrMapOvr>
-    <a:masterClrMapping/>
-  </p:clrMapOvr>
-</p:sld>
-</file>
-
-<file path=ppt/slides/slide19.xml><?xml version="1.0" encoding="utf-8"?>
-<p:sld xmlns:a="http://schemas.openxmlformats.org/drawingml/2006/main" xmlns:r="http://schemas.openxmlformats.org/officeDocument/2006/relationships" xmlns:p="http://schemas.openxmlformats.org/presentationml/2006/main">
-  <p:cSld>
-    <p:spTree>
-      <p:nvGrpSpPr>
-        <p:cNvPr id="1" name=""/>
-        <p:cNvGrpSpPr/>
-        <p:nvPr/>
-      </p:nvGrpSpPr>
-      <p:grpSpPr>
-        <a:xfrm>
-          <a:off x="0" y="0"/>
-          <a:ext cx="0" cy="0"/>
-          <a:chOff x="0" y="0"/>
-          <a:chExt cx="0" cy="0"/>
-        </a:xfrm>
-      </p:grpSpPr>
-      <p:sp>
-        <p:nvSpPr>
-          <p:cNvPr id="2" name="Title 1">
-            <a:extLst>
-              <a:ext uri="{FF2B5EF4-FFF2-40B4-BE49-F238E27FC236}">
-                <a16:creationId xmlns:a16="http://schemas.microsoft.com/office/drawing/2014/main" id="{E9812468-3249-1A9E-0BE4-818D58FD602F}"/>
-              </a:ext>
-            </a:extLst>
-          </p:cNvPr>
-          <p:cNvSpPr>
-            <a:spLocks noGrp="1"/>
-          </p:cNvSpPr>
-          <p:nvPr>
-            <p:ph type="title"/>
-          </p:nvPr>
-        </p:nvSpPr>
-        <p:spPr/>
-        <p:txBody>
-          <a:bodyPr/>
-          <a:lstStyle/>
-          <a:p>
-            <a:r>
-              <a:rPr lang="en-GB" dirty="0"/>
-              <a:t>Run projects well</a:t>
-            </a:r>
-          </a:p>
-        </p:txBody>
-      </p:sp>
-      <p:sp>
-        <p:nvSpPr>
-          <p:cNvPr id="4" name="Content Placeholder 2">
-            <a:extLst>
-              <a:ext uri="{FF2B5EF4-FFF2-40B4-BE49-F238E27FC236}">
-                <a16:creationId xmlns:a16="http://schemas.microsoft.com/office/drawing/2014/main" id="{82AD3315-213A-9719-C5F3-0D2576D0B480}"/>
-              </a:ext>
-            </a:extLst>
-          </p:cNvPr>
-          <p:cNvSpPr>
-            <a:spLocks noGrp="1"/>
-          </p:cNvSpPr>
-          <p:nvPr>
-            <p:ph idx="1"/>
-          </p:nvPr>
-        </p:nvSpPr>
-        <p:spPr>
-          <a:xfrm>
-            <a:off x="838200" y="1825625"/>
-            <a:ext cx="10515600" cy="2295806"/>
-          </a:xfrm>
-        </p:spPr>
-        <p:txBody>
-          <a:bodyPr>
-            <a:normAutofit/>
-          </a:bodyPr>
-          <a:lstStyle/>
-          <a:p>
-            <a:pPr marL="0" indent="0">
-              <a:buNone/>
-            </a:pPr>
-            <a:r>
-              <a:rPr lang="en-GB" i="1" dirty="0"/>
-              <a:t>Re-planning is often needed during research projects as objectives might change, new methods may need to be employed, new data may become available. Principles for responsible computing can be built into a research project.</a:t>
-            </a:r>
-          </a:p>
-          <a:p>
-            <a:pPr marL="0" indent="0">
-              <a:buNone/>
-            </a:pPr>
-            <a:r>
-              <a:rPr lang="en-GB" dirty="0"/>
-              <a:t>Points to consider:</a:t>
-            </a:r>
-          </a:p>
-        </p:txBody>
-      </p:sp>
-      <p:sp>
-        <p:nvSpPr>
-          <p:cNvPr id="5" name="TextBox 4">
-            <a:extLst>
-              <a:ext uri="{FF2B5EF4-FFF2-40B4-BE49-F238E27FC236}">
-                <a16:creationId xmlns:a16="http://schemas.microsoft.com/office/drawing/2014/main" id="{1FC37032-8E28-2FF2-68CB-38B0E777A051}"/>
-              </a:ext>
-            </a:extLst>
-          </p:cNvPr>
-          <p:cNvSpPr txBox="1"/>
-          <p:nvPr/>
-        </p:nvSpPr>
-        <p:spPr>
-          <a:xfrm>
-            <a:off x="339969" y="6338986"/>
-            <a:ext cx="2575770" cy="307777"/>
-          </a:xfrm>
-          <a:prstGeom prst="rect">
-            <a:avLst/>
-          </a:prstGeom>
-          <a:noFill/>
-        </p:spPr>
-        <p:txBody>
-          <a:bodyPr wrap="none" rtlCol="0">
-            <a:spAutoFit/>
-          </a:bodyPr>
-          <a:lstStyle/>
-          <a:p>
-            <a:r>
-              <a:rPr lang="en-GB" sz="1400" dirty="0"/>
-              <a:t>2. Running projects → Overview</a:t>
-            </a:r>
-          </a:p>
-        </p:txBody>
-      </p:sp>
-      <p:graphicFrame>
-        <p:nvGraphicFramePr>
-          <p:cNvPr id="3" name="Content Placeholder 5">
-            <a:extLst>
-              <a:ext uri="{FF2B5EF4-FFF2-40B4-BE49-F238E27FC236}">
-                <a16:creationId xmlns:a16="http://schemas.microsoft.com/office/drawing/2014/main" id="{5B5DDE0B-9DC3-1116-1341-E00C81190D2C}"/>
-              </a:ext>
-            </a:extLst>
-          </p:cNvPr>
-          <p:cNvGraphicFramePr>
-            <a:graphicFrameLocks/>
-          </p:cNvGraphicFramePr>
-          <p:nvPr>
-            <p:extLst>
-              <p:ext uri="{D42A27DB-BD31-4B8C-83A1-F6EECF244321}">
-                <p14:modId xmlns:p14="http://schemas.microsoft.com/office/powerpoint/2010/main" val="2125527063"/>
-              </p:ext>
-            </p:extLst>
-          </p:nvPr>
-        </p:nvGraphicFramePr>
-        <p:xfrm>
-          <a:off x="838200" y="4121431"/>
-          <a:ext cx="10515600" cy="1603375"/>
-        </p:xfrm>
-        <a:graphic>
-          <a:graphicData uri="http://schemas.openxmlformats.org/drawingml/2006/diagram">
-            <dgm:relIds xmlns:dgm="http://schemas.openxmlformats.org/drawingml/2006/diagram" xmlns:r="http://schemas.openxmlformats.org/officeDocument/2006/relationships" r:dm="rId2" r:lo="rId3" r:qs="rId4" r:cs="rId5"/>
-          </a:graphicData>
-        </a:graphic>
-      </p:graphicFrame>
-    </p:spTree>
-    <p:extLst>
-      <p:ext uri="{BB962C8B-B14F-4D97-AF65-F5344CB8AC3E}">
-        <p14:creationId xmlns:p14="http://schemas.microsoft.com/office/powerpoint/2010/main" val="1241649059"/>
       </p:ext>
     </p:extLst>
   </p:cSld>
@@ -24454,6 +23405,431 @@
 </file>
 
 <file path=ppt/slides/slide20.xml><?xml version="1.0" encoding="utf-8"?>
+<p:sld xmlns:a="http://schemas.openxmlformats.org/drawingml/2006/main" xmlns:r="http://schemas.openxmlformats.org/officeDocument/2006/relationships" xmlns:p="http://schemas.openxmlformats.org/presentationml/2006/main">
+  <p:cSld>
+    <p:spTree>
+      <p:nvGrpSpPr>
+        <p:cNvPr id="1" name=""/>
+        <p:cNvGrpSpPr/>
+        <p:nvPr/>
+      </p:nvGrpSpPr>
+      <p:grpSpPr>
+        <a:xfrm>
+          <a:off x="0" y="0"/>
+          <a:ext cx="0" cy="0"/>
+          <a:chOff x="0" y="0"/>
+          <a:chExt cx="0" cy="0"/>
+        </a:xfrm>
+      </p:grpSpPr>
+      <p:sp>
+        <p:nvSpPr>
+          <p:cNvPr id="2" name="Title 1">
+            <a:extLst>
+              <a:ext uri="{FF2B5EF4-FFF2-40B4-BE49-F238E27FC236}">
+                <a16:creationId xmlns:a16="http://schemas.microsoft.com/office/drawing/2014/main" id="{A814621E-C0EE-1C9D-6938-ACBD96847E5D}"/>
+              </a:ext>
+            </a:extLst>
+          </p:cNvPr>
+          <p:cNvSpPr>
+            <a:spLocks noGrp="1"/>
+          </p:cNvSpPr>
+          <p:nvPr>
+            <p:ph type="title"/>
+          </p:nvPr>
+        </p:nvSpPr>
+        <p:spPr/>
+        <p:txBody>
+          <a:bodyPr/>
+          <a:lstStyle/>
+          <a:p>
+            <a:r>
+              <a:rPr lang="en-GB" dirty="0">
+                <a:solidFill>
+                  <a:schemeClr val="accent3">
+                    <a:lumMod val="75000"/>
+                  </a:schemeClr>
+                </a:solidFill>
+              </a:rPr>
+              <a:t>Solution</a:t>
+            </a:r>
+          </a:p>
+        </p:txBody>
+      </p:sp>
+      <p:sp>
+        <p:nvSpPr>
+          <p:cNvPr id="3" name="Content Placeholder 2">
+            <a:extLst>
+              <a:ext uri="{FF2B5EF4-FFF2-40B4-BE49-F238E27FC236}">
+                <a16:creationId xmlns:a16="http://schemas.microsoft.com/office/drawing/2014/main" id="{167A0CF7-A9EB-EA5E-91E3-2AEF8C161A84}"/>
+              </a:ext>
+            </a:extLst>
+          </p:cNvPr>
+          <p:cNvSpPr>
+            <a:spLocks noGrp="1"/>
+          </p:cNvSpPr>
+          <p:nvPr>
+            <p:ph idx="1"/>
+          </p:nvPr>
+        </p:nvSpPr>
+        <p:spPr/>
+        <p:txBody>
+          <a:bodyPr>
+            <a:normAutofit fontScale="62500" lnSpcReduction="20000"/>
+          </a:bodyPr>
+          <a:lstStyle/>
+          <a:p>
+            <a:pPr marL="0" indent="0">
+              <a:buNone/>
+            </a:pPr>
+            <a:r>
+              <a:rPr lang="en-GB" dirty="0"/>
+              <a:t>Use data resources responsibly:</a:t>
+            </a:r>
+          </a:p>
+          <a:p>
+            <a:r>
+              <a:rPr lang="en-GB" dirty="0"/>
+              <a:t>Plan which intermediate files need to be kept, and which can be deleted</a:t>
+            </a:r>
+          </a:p>
+          <a:p>
+            <a:r>
+              <a:rPr lang="en-GB" dirty="0"/>
+              <a:t>Arrange for shared access to datasets rather than multiple copies</a:t>
+            </a:r>
+          </a:p>
+          <a:p>
+            <a:r>
+              <a:rPr lang="en-GB" dirty="0"/>
+              <a:t>Identify data that can be compressed or moved to archival storage</a:t>
+            </a:r>
+          </a:p>
+          <a:p>
+            <a:r>
+              <a:rPr lang="en-GB" dirty="0"/>
+              <a:t>Schedule regular data review points during the project</a:t>
+            </a:r>
+          </a:p>
+          <a:p>
+            <a:r>
+              <a:rPr lang="en-GB" dirty="0"/>
+              <a:t>Plan to follow FAIR data principles from the start</a:t>
+            </a:r>
+          </a:p>
+          <a:p>
+            <a:pPr marL="0" indent="0">
+              <a:buNone/>
+            </a:pPr>
+            <a:endParaRPr lang="en-GB" dirty="0"/>
+          </a:p>
+          <a:p>
+            <a:pPr marL="0" indent="0">
+              <a:buNone/>
+            </a:pPr>
+            <a:r>
+              <a:rPr lang="en-GB" dirty="0"/>
+              <a:t>Select the right HPC resource:</a:t>
+            </a:r>
+          </a:p>
+          <a:p>
+            <a:r>
+              <a:rPr lang="en-GB" dirty="0"/>
+              <a:t>Choose an HPC facility in a location with low carbon intensity (e.g., northern UK)</a:t>
+            </a:r>
+          </a:p>
+          <a:p>
+            <a:r>
+              <a:rPr lang="en-GB" dirty="0"/>
+              <a:t>Consider whether existing resources can be used before requesting new allocations</a:t>
+            </a:r>
+          </a:p>
+          <a:p>
+            <a:r>
+              <a:rPr lang="en-GB" dirty="0"/>
+              <a:t>Evaluate whether shared resources would be more sustainable than dedicated resources</a:t>
+            </a:r>
+          </a:p>
+          <a:p>
+            <a:r>
+              <a:rPr lang="en-GB" dirty="0"/>
+              <a:t>Balance embodied vs operational emissions in facility selection</a:t>
+            </a:r>
+          </a:p>
+          <a:p>
+            <a:r>
+              <a:rPr lang="en-GB" dirty="0"/>
+              <a:t>Consider the energy efficiency of different hardware options</a:t>
+            </a:r>
+          </a:p>
+        </p:txBody>
+      </p:sp>
+    </p:spTree>
+    <p:extLst>
+      <p:ext uri="{BB962C8B-B14F-4D97-AF65-F5344CB8AC3E}">
+        <p14:creationId xmlns:p14="http://schemas.microsoft.com/office/powerpoint/2010/main" val="3784147056"/>
+      </p:ext>
+    </p:extLst>
+  </p:cSld>
+  <p:clrMapOvr>
+    <a:masterClrMapping/>
+  </p:clrMapOvr>
+</p:sld>
+</file>
+
+<file path=ppt/slides/slide21.xml><?xml version="1.0" encoding="utf-8"?>
+<p:sld xmlns:a="http://schemas.openxmlformats.org/drawingml/2006/main" xmlns:r="http://schemas.openxmlformats.org/officeDocument/2006/relationships" xmlns:p="http://schemas.openxmlformats.org/presentationml/2006/main">
+  <p:cSld>
+    <p:spTree>
+      <p:nvGrpSpPr>
+        <p:cNvPr id="1" name=""/>
+        <p:cNvGrpSpPr/>
+        <p:nvPr/>
+      </p:nvGrpSpPr>
+      <p:grpSpPr>
+        <a:xfrm>
+          <a:off x="0" y="0"/>
+          <a:ext cx="0" cy="0"/>
+          <a:chOff x="0" y="0"/>
+          <a:chExt cx="0" cy="0"/>
+        </a:xfrm>
+      </p:grpSpPr>
+      <p:sp>
+        <p:nvSpPr>
+          <p:cNvPr id="2" name="Title 1">
+            <a:extLst>
+              <a:ext uri="{FF2B5EF4-FFF2-40B4-BE49-F238E27FC236}">
+                <a16:creationId xmlns:a16="http://schemas.microsoft.com/office/drawing/2014/main" id="{E15F16C5-32AA-33D1-E25B-B891FF9A206E}"/>
+              </a:ext>
+            </a:extLst>
+          </p:cNvPr>
+          <p:cNvSpPr>
+            <a:spLocks noGrp="1"/>
+          </p:cNvSpPr>
+          <p:nvPr>
+            <p:ph type="title"/>
+          </p:nvPr>
+        </p:nvSpPr>
+        <p:spPr/>
+        <p:txBody>
+          <a:bodyPr/>
+          <a:lstStyle/>
+          <a:p>
+            <a:r>
+              <a:rPr lang="en-GB" dirty="0"/>
+              <a:t>3. Running the project </a:t>
+            </a:r>
+          </a:p>
+        </p:txBody>
+      </p:sp>
+      <p:sp>
+        <p:nvSpPr>
+          <p:cNvPr id="3" name="Text Placeholder 2">
+            <a:extLst>
+              <a:ext uri="{FF2B5EF4-FFF2-40B4-BE49-F238E27FC236}">
+                <a16:creationId xmlns:a16="http://schemas.microsoft.com/office/drawing/2014/main" id="{906A5AEE-B17A-1F2B-0815-3465F88B06C8}"/>
+              </a:ext>
+            </a:extLst>
+          </p:cNvPr>
+          <p:cNvSpPr>
+            <a:spLocks noGrp="1"/>
+          </p:cNvSpPr>
+          <p:nvPr>
+            <p:ph type="body" idx="1"/>
+          </p:nvPr>
+        </p:nvSpPr>
+        <p:spPr/>
+        <p:txBody>
+          <a:bodyPr/>
+          <a:lstStyle/>
+          <a:p>
+            <a:endParaRPr lang="en-GB"/>
+          </a:p>
+        </p:txBody>
+      </p:sp>
+    </p:spTree>
+    <p:extLst>
+      <p:ext uri="{BB962C8B-B14F-4D97-AF65-F5344CB8AC3E}">
+        <p14:creationId xmlns:p14="http://schemas.microsoft.com/office/powerpoint/2010/main" val="2182465690"/>
+      </p:ext>
+    </p:extLst>
+  </p:cSld>
+  <p:clrMapOvr>
+    <a:masterClrMapping/>
+  </p:clrMapOvr>
+</p:sld>
+</file>
+
+<file path=ppt/slides/slide22.xml><?xml version="1.0" encoding="utf-8"?>
+<p:sld xmlns:a="http://schemas.openxmlformats.org/drawingml/2006/main" xmlns:r="http://schemas.openxmlformats.org/officeDocument/2006/relationships" xmlns:p="http://schemas.openxmlformats.org/presentationml/2006/main">
+  <p:cSld>
+    <p:spTree>
+      <p:nvGrpSpPr>
+        <p:cNvPr id="1" name=""/>
+        <p:cNvGrpSpPr/>
+        <p:nvPr/>
+      </p:nvGrpSpPr>
+      <p:grpSpPr>
+        <a:xfrm>
+          <a:off x="0" y="0"/>
+          <a:ext cx="0" cy="0"/>
+          <a:chOff x="0" y="0"/>
+          <a:chExt cx="0" cy="0"/>
+        </a:xfrm>
+      </p:grpSpPr>
+      <p:sp>
+        <p:nvSpPr>
+          <p:cNvPr id="2" name="Title 1">
+            <a:extLst>
+              <a:ext uri="{FF2B5EF4-FFF2-40B4-BE49-F238E27FC236}">
+                <a16:creationId xmlns:a16="http://schemas.microsoft.com/office/drawing/2014/main" id="{E9812468-3249-1A9E-0BE4-818D58FD602F}"/>
+              </a:ext>
+            </a:extLst>
+          </p:cNvPr>
+          <p:cNvSpPr>
+            <a:spLocks noGrp="1"/>
+          </p:cNvSpPr>
+          <p:nvPr>
+            <p:ph type="title"/>
+          </p:nvPr>
+        </p:nvSpPr>
+        <p:spPr/>
+        <p:txBody>
+          <a:bodyPr/>
+          <a:lstStyle/>
+          <a:p>
+            <a:r>
+              <a:rPr lang="en-GB" dirty="0"/>
+              <a:t>Run projects well</a:t>
+            </a:r>
+          </a:p>
+        </p:txBody>
+      </p:sp>
+      <p:sp>
+        <p:nvSpPr>
+          <p:cNvPr id="4" name="Content Placeholder 2">
+            <a:extLst>
+              <a:ext uri="{FF2B5EF4-FFF2-40B4-BE49-F238E27FC236}">
+                <a16:creationId xmlns:a16="http://schemas.microsoft.com/office/drawing/2014/main" id="{82AD3315-213A-9719-C5F3-0D2576D0B480}"/>
+              </a:ext>
+            </a:extLst>
+          </p:cNvPr>
+          <p:cNvSpPr>
+            <a:spLocks noGrp="1"/>
+          </p:cNvSpPr>
+          <p:nvPr>
+            <p:ph idx="1"/>
+          </p:nvPr>
+        </p:nvSpPr>
+        <p:spPr>
+          <a:xfrm>
+            <a:off x="838200" y="1825625"/>
+            <a:ext cx="10515600" cy="2295806"/>
+          </a:xfrm>
+        </p:spPr>
+        <p:txBody>
+          <a:bodyPr>
+            <a:normAutofit/>
+          </a:bodyPr>
+          <a:lstStyle/>
+          <a:p>
+            <a:pPr marL="0" indent="0">
+              <a:buNone/>
+            </a:pPr>
+            <a:r>
+              <a:rPr lang="en-GB" i="1" dirty="0"/>
+              <a:t>Re-planning is often needed during research projects as objectives might change, new methods may need to be employed, new data may become available. Principles for responsible computing can be built into a research project.</a:t>
+            </a:r>
+          </a:p>
+          <a:p>
+            <a:pPr marL="0" indent="0">
+              <a:buNone/>
+            </a:pPr>
+            <a:r>
+              <a:rPr lang="en-GB" dirty="0"/>
+              <a:t>Points to consider:</a:t>
+            </a:r>
+          </a:p>
+        </p:txBody>
+      </p:sp>
+      <p:sp>
+        <p:nvSpPr>
+          <p:cNvPr id="5" name="TextBox 4">
+            <a:extLst>
+              <a:ext uri="{FF2B5EF4-FFF2-40B4-BE49-F238E27FC236}">
+                <a16:creationId xmlns:a16="http://schemas.microsoft.com/office/drawing/2014/main" id="{1FC37032-8E28-2FF2-68CB-38B0E777A051}"/>
+              </a:ext>
+            </a:extLst>
+          </p:cNvPr>
+          <p:cNvSpPr txBox="1"/>
+          <p:nvPr/>
+        </p:nvSpPr>
+        <p:spPr>
+          <a:xfrm>
+            <a:off x="339969" y="6338986"/>
+            <a:ext cx="2575770" cy="307777"/>
+          </a:xfrm>
+          <a:prstGeom prst="rect">
+            <a:avLst/>
+          </a:prstGeom>
+          <a:noFill/>
+        </p:spPr>
+        <p:txBody>
+          <a:bodyPr wrap="none" rtlCol="0">
+            <a:spAutoFit/>
+          </a:bodyPr>
+          <a:lstStyle/>
+          <a:p>
+            <a:r>
+              <a:rPr lang="en-GB" sz="1400" dirty="0"/>
+              <a:t>2. Running projects → Overview</a:t>
+            </a:r>
+          </a:p>
+        </p:txBody>
+      </p:sp>
+      <p:graphicFrame>
+        <p:nvGraphicFramePr>
+          <p:cNvPr id="3" name="Content Placeholder 5">
+            <a:extLst>
+              <a:ext uri="{FF2B5EF4-FFF2-40B4-BE49-F238E27FC236}">
+                <a16:creationId xmlns:a16="http://schemas.microsoft.com/office/drawing/2014/main" id="{5B5DDE0B-9DC3-1116-1341-E00C81190D2C}"/>
+              </a:ext>
+            </a:extLst>
+          </p:cNvPr>
+          <p:cNvGraphicFramePr>
+            <a:graphicFrameLocks/>
+          </p:cNvGraphicFramePr>
+          <p:nvPr>
+            <p:extLst>
+              <p:ext uri="{D42A27DB-BD31-4B8C-83A1-F6EECF244321}">
+                <p14:modId xmlns:p14="http://schemas.microsoft.com/office/powerpoint/2010/main" val="2125527063"/>
+              </p:ext>
+            </p:extLst>
+          </p:nvPr>
+        </p:nvGraphicFramePr>
+        <p:xfrm>
+          <a:off x="838200" y="4121431"/>
+          <a:ext cx="10515600" cy="1603375"/>
+        </p:xfrm>
+        <a:graphic>
+          <a:graphicData uri="http://schemas.openxmlformats.org/drawingml/2006/diagram">
+            <dgm:relIds xmlns:dgm="http://schemas.openxmlformats.org/drawingml/2006/diagram" xmlns:r="http://schemas.openxmlformats.org/officeDocument/2006/relationships" r:dm="rId2" r:lo="rId3" r:qs="rId4" r:cs="rId5"/>
+          </a:graphicData>
+        </a:graphic>
+      </p:graphicFrame>
+    </p:spTree>
+    <p:extLst>
+      <p:ext uri="{BB962C8B-B14F-4D97-AF65-F5344CB8AC3E}">
+        <p14:creationId xmlns:p14="http://schemas.microsoft.com/office/powerpoint/2010/main" val="1241649059"/>
+      </p:ext>
+    </p:extLst>
+  </p:cSld>
+  <p:clrMapOvr>
+    <a:masterClrMapping/>
+  </p:clrMapOvr>
+</p:sld>
+</file>
+
+<file path=ppt/slides/slide23.xml><?xml version="1.0" encoding="utf-8"?>
 <p:sld xmlns:a="http://schemas.openxmlformats.org/drawingml/2006/main" xmlns:r="http://schemas.openxmlformats.org/officeDocument/2006/relationships" xmlns:p="http://schemas.openxmlformats.org/presentationml/2006/main">
   <p:cSld>
     <p:spTree>
@@ -24739,7 +24115,7 @@
 </p:sld>
 </file>
 
-<file path=ppt/slides/slide21.xml><?xml version="1.0" encoding="utf-8"?>
+<file path=ppt/slides/slide24.xml><?xml version="1.0" encoding="utf-8"?>
 <p:sld xmlns:a="http://schemas.openxmlformats.org/drawingml/2006/main" xmlns:r="http://schemas.openxmlformats.org/officeDocument/2006/relationships" xmlns:p="http://schemas.openxmlformats.org/presentationml/2006/main">
   <p:cSld>
     <p:spTree>
@@ -25019,7 +24395,7 @@
 </p:sld>
 </file>
 
-<file path=ppt/slides/slide22.xml><?xml version="1.0" encoding="utf-8"?>
+<file path=ppt/slides/slide25.xml><?xml version="1.0" encoding="utf-8"?>
 <p:sld xmlns:a="http://schemas.openxmlformats.org/drawingml/2006/main" xmlns:r="http://schemas.openxmlformats.org/officeDocument/2006/relationships" xmlns:p="http://schemas.openxmlformats.org/presentationml/2006/main">
   <p:cSld>
     <p:spTree>
@@ -25102,7 +24478,7 @@
 </p:sld>
 </file>
 
-<file path=ppt/slides/slide23.xml><?xml version="1.0" encoding="utf-8"?>
+<file path=ppt/slides/slide26.xml><?xml version="1.0" encoding="utf-8"?>
 <p:sld xmlns:a="http://schemas.openxmlformats.org/drawingml/2006/main" xmlns:r="http://schemas.openxmlformats.org/officeDocument/2006/relationships" xmlns:p="http://schemas.openxmlformats.org/presentationml/2006/main">
   <p:cSld>
     <p:spTree>
@@ -25238,7 +24614,7 @@
 </p:sld>
 </file>
 
-<file path=ppt/slides/slide24.xml><?xml version="1.0" encoding="utf-8"?>
+<file path=ppt/slides/slide27.xml><?xml version="1.0" encoding="utf-8"?>
 <p:sld xmlns:a="http://schemas.openxmlformats.org/drawingml/2006/main" xmlns:r="http://schemas.openxmlformats.org/officeDocument/2006/relationships" xmlns:p="http://schemas.openxmlformats.org/presentationml/2006/main">
   <p:cSld>
     <p:spTree>
@@ -25823,7 +25199,7 @@
 </p:sld>
 </file>
 
-<file path=ppt/slides/slide25.xml><?xml version="1.0" encoding="utf-8"?>
+<file path=ppt/slides/slide28.xml><?xml version="1.0" encoding="utf-8"?>
 <p:sld xmlns:a="http://schemas.openxmlformats.org/drawingml/2006/main" xmlns:r="http://schemas.openxmlformats.org/officeDocument/2006/relationships" xmlns:p="http://schemas.openxmlformats.org/presentationml/2006/main">
   <p:cSld>
     <p:spTree>
@@ -25873,7 +25249,7 @@
                   <a:schemeClr val="accent3"/>
                 </a:solidFill>
               </a:rPr>
-              <a:t>Exercise #4: 5 minutes</a:t>
+              <a:t>Challenge</a:t>
             </a:r>
           </a:p>
         </p:txBody>
@@ -25942,7 +25318,263 @@
 </p:sld>
 </file>
 
-<file path=ppt/slides/slide26.xml><?xml version="1.0" encoding="utf-8"?>
+<file path=ppt/slides/slide29.xml><?xml version="1.0" encoding="utf-8"?>
+<p:sld xmlns:a="http://schemas.openxmlformats.org/drawingml/2006/main" xmlns:r="http://schemas.openxmlformats.org/officeDocument/2006/relationships" xmlns:p="http://schemas.openxmlformats.org/presentationml/2006/main">
+  <p:cSld>
+    <p:spTree>
+      <p:nvGrpSpPr>
+        <p:cNvPr id="1" name=""/>
+        <p:cNvGrpSpPr/>
+        <p:nvPr/>
+      </p:nvGrpSpPr>
+      <p:grpSpPr>
+        <a:xfrm>
+          <a:off x="0" y="0"/>
+          <a:ext cx="0" cy="0"/>
+          <a:chOff x="0" y="0"/>
+          <a:chExt cx="0" cy="0"/>
+        </a:xfrm>
+      </p:grpSpPr>
+      <p:sp>
+        <p:nvSpPr>
+          <p:cNvPr id="2" name="Title 1">
+            <a:extLst>
+              <a:ext uri="{FF2B5EF4-FFF2-40B4-BE49-F238E27FC236}">
+                <a16:creationId xmlns:a16="http://schemas.microsoft.com/office/drawing/2014/main" id="{28532997-ABBC-4FA1-59E0-F1CCC3E956D4}"/>
+              </a:ext>
+            </a:extLst>
+          </p:cNvPr>
+          <p:cNvSpPr>
+            <a:spLocks noGrp="1"/>
+          </p:cNvSpPr>
+          <p:nvPr>
+            <p:ph type="title"/>
+          </p:nvPr>
+        </p:nvSpPr>
+        <p:spPr/>
+        <p:txBody>
+          <a:bodyPr/>
+          <a:lstStyle/>
+          <a:p>
+            <a:r>
+              <a:rPr lang="en-GB" dirty="0">
+                <a:solidFill>
+                  <a:schemeClr val="accent3">
+                    <a:lumMod val="75000"/>
+                  </a:schemeClr>
+                </a:solidFill>
+              </a:rPr>
+              <a:t>Solution</a:t>
+            </a:r>
+          </a:p>
+        </p:txBody>
+      </p:sp>
+      <p:sp>
+        <p:nvSpPr>
+          <p:cNvPr id="3" name="Content Placeholder 2">
+            <a:extLst>
+              <a:ext uri="{FF2B5EF4-FFF2-40B4-BE49-F238E27FC236}">
+                <a16:creationId xmlns:a16="http://schemas.microsoft.com/office/drawing/2014/main" id="{B12508BB-7999-B883-BEFF-B84C6CF69252}"/>
+              </a:ext>
+            </a:extLst>
+          </p:cNvPr>
+          <p:cNvSpPr>
+            <a:spLocks noGrp="1"/>
+          </p:cNvSpPr>
+          <p:nvPr>
+            <p:ph idx="1"/>
+          </p:nvPr>
+        </p:nvSpPr>
+        <p:spPr/>
+        <p:txBody>
+          <a:bodyPr>
+            <a:normAutofit fontScale="70000" lnSpcReduction="20000"/>
+          </a:bodyPr>
+          <a:lstStyle/>
+          <a:p>
+            <a:pPr marL="0" indent="0">
+              <a:buNone/>
+            </a:pPr>
+            <a:r>
+              <a:rPr lang="en-GB" dirty="0"/>
+              <a:t>Your answers might include:</a:t>
+            </a:r>
+          </a:p>
+          <a:p>
+            <a:pPr marL="0" indent="0">
+              <a:buNone/>
+            </a:pPr>
+            <a:endParaRPr lang="en-GB" dirty="0"/>
+          </a:p>
+          <a:p>
+            <a:r>
+              <a:rPr lang="en-GB" dirty="0"/>
+              <a:t>Review all data and identify what genuinely needs to be retained vs what can be deleted</a:t>
+            </a:r>
+          </a:p>
+          <a:p>
+            <a:r>
+              <a:rPr lang="en-GB" dirty="0"/>
+              <a:t>Publish datasets in a recognised repository with appropriate metadata (making them FAIR)</a:t>
+            </a:r>
+          </a:p>
+          <a:p>
+            <a:r>
+              <a:rPr lang="en-GB" dirty="0"/>
+              <a:t>Publish code with documentation to enable others to build on your work</a:t>
+            </a:r>
+          </a:p>
+          <a:p>
+            <a:r>
+              <a:rPr lang="en-GB" dirty="0"/>
+              <a:t>Write clear documentation explaining methods and results</a:t>
+            </a:r>
+          </a:p>
+          <a:p>
+            <a:r>
+              <a:rPr lang="en-GB" dirty="0"/>
+              <a:t>Consider writing up negative results to prevent others repeating the same unsuccessful approaches</a:t>
+            </a:r>
+          </a:p>
+          <a:p>
+            <a:r>
+              <a:rPr lang="en-GB" dirty="0"/>
+              <a:t>Ensure data is in standard, interoperable formats</a:t>
+            </a:r>
+          </a:p>
+          <a:p>
+            <a:r>
+              <a:rPr lang="en-GB" dirty="0"/>
+              <a:t>Apply appropriate licenses to enable reuse</a:t>
+            </a:r>
+          </a:p>
+          <a:p>
+            <a:r>
+              <a:rPr lang="en-GB" dirty="0"/>
+              <a:t>Archive project materials in long-term storage</a:t>
+            </a:r>
+          </a:p>
+          <a:p>
+            <a:r>
+              <a:rPr lang="en-GB" dirty="0"/>
+              <a:t>Share lessons learned about efficient resource use with the community</a:t>
+            </a:r>
+          </a:p>
+        </p:txBody>
+      </p:sp>
+    </p:spTree>
+    <p:extLst>
+      <p:ext uri="{BB962C8B-B14F-4D97-AF65-F5344CB8AC3E}">
+        <p14:creationId xmlns:p14="http://schemas.microsoft.com/office/powerpoint/2010/main" val="1804721935"/>
+      </p:ext>
+    </p:extLst>
+  </p:cSld>
+  <p:clrMapOvr>
+    <a:masterClrMapping/>
+  </p:clrMapOvr>
+</p:sld>
+</file>
+
+<file path=ppt/slides/slide3.xml><?xml version="1.0" encoding="utf-8"?>
+<p:sld xmlns:a="http://schemas.openxmlformats.org/drawingml/2006/main" xmlns:r="http://schemas.openxmlformats.org/officeDocument/2006/relationships" xmlns:p="http://schemas.openxmlformats.org/presentationml/2006/main">
+  <p:cSld>
+    <p:spTree>
+      <p:nvGrpSpPr>
+        <p:cNvPr id="1" name=""/>
+        <p:cNvGrpSpPr/>
+        <p:nvPr/>
+      </p:nvGrpSpPr>
+      <p:grpSpPr>
+        <a:xfrm>
+          <a:off x="0" y="0"/>
+          <a:ext cx="0" cy="0"/>
+          <a:chOff x="0" y="0"/>
+          <a:chExt cx="0" cy="0"/>
+        </a:xfrm>
+      </p:grpSpPr>
+      <p:sp>
+        <p:nvSpPr>
+          <p:cNvPr id="2" name="Title 1">
+            <a:extLst>
+              <a:ext uri="{FF2B5EF4-FFF2-40B4-BE49-F238E27FC236}">
+                <a16:creationId xmlns:a16="http://schemas.microsoft.com/office/drawing/2014/main" id="{723FD012-7837-9202-AC44-A4DE209D3E74}"/>
+              </a:ext>
+            </a:extLst>
+          </p:cNvPr>
+          <p:cNvSpPr>
+            <a:spLocks noGrp="1"/>
+          </p:cNvSpPr>
+          <p:nvPr>
+            <p:ph type="title"/>
+          </p:nvPr>
+        </p:nvSpPr>
+        <p:spPr/>
+        <p:txBody>
+          <a:bodyPr/>
+          <a:lstStyle/>
+          <a:p>
+            <a:r>
+              <a:rPr lang="en-GB" dirty="0"/>
+              <a:t>Why are RCPs useful/needed?</a:t>
+            </a:r>
+          </a:p>
+        </p:txBody>
+      </p:sp>
+      <p:sp>
+        <p:nvSpPr>
+          <p:cNvPr id="3" name="Content Placeholder 2">
+            <a:extLst>
+              <a:ext uri="{FF2B5EF4-FFF2-40B4-BE49-F238E27FC236}">
+                <a16:creationId xmlns:a16="http://schemas.microsoft.com/office/drawing/2014/main" id="{07C217AF-1DF4-D381-5B24-43989B0C3532}"/>
+              </a:ext>
+            </a:extLst>
+          </p:cNvPr>
+          <p:cNvSpPr>
+            <a:spLocks noGrp="1"/>
+          </p:cNvSpPr>
+          <p:nvPr>
+            <p:ph idx="1"/>
+          </p:nvPr>
+        </p:nvSpPr>
+        <p:spPr/>
+        <p:txBody>
+          <a:bodyPr/>
+          <a:lstStyle/>
+          <a:p>
+            <a:r>
+              <a:rPr lang="en-GB" dirty="0"/>
+              <a:t>Disconnect between use and awareness of resources used</a:t>
+            </a:r>
+          </a:p>
+          <a:p>
+            <a:r>
+              <a:rPr lang="en-GB" dirty="0"/>
+              <a:t>Default position is often to use more resources to achieve progress rather than think carefully about the best way to achieve the results</a:t>
+            </a:r>
+          </a:p>
+          <a:p>
+            <a:pPr lvl="1"/>
+            <a:r>
+              <a:rPr lang="en-GB" dirty="0"/>
+              <a:t>“Reach for the bigger hammer rather than the right tool.”</a:t>
+            </a:r>
+          </a:p>
+        </p:txBody>
+      </p:sp>
+    </p:spTree>
+    <p:extLst>
+      <p:ext uri="{BB962C8B-B14F-4D97-AF65-F5344CB8AC3E}">
+        <p14:creationId xmlns:p14="http://schemas.microsoft.com/office/powerpoint/2010/main" val="255959611"/>
+      </p:ext>
+    </p:extLst>
+  </p:cSld>
+  <p:clrMapOvr>
+    <a:masterClrMapping/>
+  </p:clrMapOvr>
+</p:sld>
+</file>
+
+<file path=ppt/slides/slide30.xml><?xml version="1.0" encoding="utf-8"?>
 <p:sld xmlns:a="http://schemas.openxmlformats.org/drawingml/2006/main" xmlns:r="http://schemas.openxmlformats.org/officeDocument/2006/relationships" xmlns:p="http://schemas.openxmlformats.org/presentationml/2006/main">
   <p:cSld>
     <p:spTree>
@@ -26070,105 +25702,6 @@
 </p:sld>
 </file>
 
-<file path=ppt/slides/slide3.xml><?xml version="1.0" encoding="utf-8"?>
-<p:sld xmlns:a="http://schemas.openxmlformats.org/drawingml/2006/main" xmlns:r="http://schemas.openxmlformats.org/officeDocument/2006/relationships" xmlns:p="http://schemas.openxmlformats.org/presentationml/2006/main">
-  <p:cSld>
-    <p:spTree>
-      <p:nvGrpSpPr>
-        <p:cNvPr id="1" name=""/>
-        <p:cNvGrpSpPr/>
-        <p:nvPr/>
-      </p:nvGrpSpPr>
-      <p:grpSpPr>
-        <a:xfrm>
-          <a:off x="0" y="0"/>
-          <a:ext cx="0" cy="0"/>
-          <a:chOff x="0" y="0"/>
-          <a:chExt cx="0" cy="0"/>
-        </a:xfrm>
-      </p:grpSpPr>
-      <p:sp>
-        <p:nvSpPr>
-          <p:cNvPr id="2" name="Title 1">
-            <a:extLst>
-              <a:ext uri="{FF2B5EF4-FFF2-40B4-BE49-F238E27FC236}">
-                <a16:creationId xmlns:a16="http://schemas.microsoft.com/office/drawing/2014/main" id="{723FD012-7837-9202-AC44-A4DE209D3E74}"/>
-              </a:ext>
-            </a:extLst>
-          </p:cNvPr>
-          <p:cNvSpPr>
-            <a:spLocks noGrp="1"/>
-          </p:cNvSpPr>
-          <p:nvPr>
-            <p:ph type="title"/>
-          </p:nvPr>
-        </p:nvSpPr>
-        <p:spPr/>
-        <p:txBody>
-          <a:bodyPr/>
-          <a:lstStyle/>
-          <a:p>
-            <a:r>
-              <a:rPr lang="en-GB" dirty="0"/>
-              <a:t>Why are RCPs useful/needed?</a:t>
-            </a:r>
-          </a:p>
-        </p:txBody>
-      </p:sp>
-      <p:sp>
-        <p:nvSpPr>
-          <p:cNvPr id="3" name="Content Placeholder 2">
-            <a:extLst>
-              <a:ext uri="{FF2B5EF4-FFF2-40B4-BE49-F238E27FC236}">
-                <a16:creationId xmlns:a16="http://schemas.microsoft.com/office/drawing/2014/main" id="{07C217AF-1DF4-D381-5B24-43989B0C3532}"/>
-              </a:ext>
-            </a:extLst>
-          </p:cNvPr>
-          <p:cNvSpPr>
-            <a:spLocks noGrp="1"/>
-          </p:cNvSpPr>
-          <p:nvPr>
-            <p:ph idx="1"/>
-          </p:nvPr>
-        </p:nvSpPr>
-        <p:spPr/>
-        <p:txBody>
-          <a:bodyPr/>
-          <a:lstStyle/>
-          <a:p>
-            <a:r>
-              <a:rPr lang="en-GB" dirty="0"/>
-              <a:t>Disconnect between use and awareness of resources used</a:t>
-            </a:r>
-          </a:p>
-          <a:p>
-            <a:r>
-              <a:rPr lang="en-GB" dirty="0"/>
-              <a:t>Default position is often to use more resources to achieve progress rather than think carefully about the best way to achieve the results</a:t>
-            </a:r>
-          </a:p>
-          <a:p>
-            <a:pPr lvl="1"/>
-            <a:r>
-              <a:rPr lang="en-GB" dirty="0"/>
-              <a:t>“Reach for the bigger hammer rather than the right tool.”</a:t>
-            </a:r>
-          </a:p>
-        </p:txBody>
-      </p:sp>
-    </p:spTree>
-    <p:extLst>
-      <p:ext uri="{BB962C8B-B14F-4D97-AF65-F5344CB8AC3E}">
-        <p14:creationId xmlns:p14="http://schemas.microsoft.com/office/powerpoint/2010/main" val="255959611"/>
-      </p:ext>
-    </p:extLst>
-  </p:cSld>
-  <p:clrMapOvr>
-    <a:masterClrMapping/>
-  </p:clrMapOvr>
-</p:sld>
-</file>
-
 <file path=ppt/slides/slide4.xml><?xml version="1.0" encoding="utf-8"?>
 <p:sld xmlns:a="http://schemas.openxmlformats.org/drawingml/2006/main" xmlns:r="http://schemas.openxmlformats.org/officeDocument/2006/relationships" xmlns:p="http://schemas.openxmlformats.org/presentationml/2006/main">
   <p:cSld>
@@ -26543,7 +26076,7 @@
                   <a:schemeClr val="accent3"/>
                 </a:solidFill>
               </a:rPr>
-              <a:t>Exercise #1: 10 minutes</a:t>
+              <a:t>Challenge:</a:t>
             </a:r>
           </a:p>
         </p:txBody>
@@ -26566,27 +26099,38 @@
         </p:nvSpPr>
         <p:spPr>
           <a:xfrm>
-            <a:off x="838200" y="1665205"/>
+            <a:off x="838200" y="1403949"/>
             <a:ext cx="10515600" cy="4351338"/>
           </a:xfrm>
         </p:spPr>
         <p:txBody>
-          <a:bodyPr/>
+          <a:bodyPr>
+            <a:normAutofit/>
+          </a:bodyPr>
           <a:lstStyle/>
+          <a:p>
+            <a:pPr marL="0" indent="0">
+              <a:buNone/>
+            </a:pPr>
+            <a:r>
+              <a:rPr lang="en-GB" sz="2000" dirty="0"/>
+              <a:t>Choose a project you are (or have been) involved in </a:t>
+            </a:r>
+            <a:br>
+              <a:rPr lang="en-GB" sz="2000" dirty="0"/>
+            </a:br>
+            <a:r>
+              <a:rPr lang="en-GB" sz="2000" dirty="0"/>
+              <a:t>…or, make up a plausible project scenario</a:t>
+            </a:r>
+          </a:p>
           <a:p>
             <a:pPr marL="514350" indent="-514350">
               <a:buAutoNum type="arabicParenR"/>
             </a:pPr>
             <a:r>
-              <a:rPr lang="en-GB" dirty="0"/>
-              <a:t>Choose a project you are (or have been) involved in </a:t>
-            </a:r>
-            <a:br>
-              <a:rPr lang="en-GB" dirty="0"/>
-            </a:br>
-            <a:r>
-              <a:rPr lang="en-GB" dirty="0"/>
-              <a:t>…or, make up a plausible project scenario</a:t>
+              <a:rPr lang="en-GB" sz="2000" dirty="0"/>
+              <a:t>Write up the project overview in 2-3 sentences</a:t>
             </a:r>
           </a:p>
           <a:p>
@@ -26594,17 +26138,32 @@
               <a:buAutoNum type="arabicParenR"/>
             </a:pPr>
             <a:r>
-              <a:rPr lang="en-GB" dirty="0"/>
-              <a:t>Write up the project overview in 2-3 sentences</a:t>
+              <a:rPr lang="en-GB" sz="2000" dirty="0"/>
+              <a:t>Produce 2-3 bullet points that describe how the project could have positive environmental impact. This would ideally include at least one point that could be evaluated quantitatively. Classify the points as </a:t>
             </a:r>
-          </a:p>
-          <a:p>
-            <a:pPr marL="514350" indent="-514350">
-              <a:buAutoNum type="arabicParenR"/>
-            </a:pPr>
             <a:r>
-              <a:rPr lang="en-GB" dirty="0"/>
-              <a:t>Produce a proposed environmental impact statement</a:t>
+              <a:rPr lang="en-GB" sz="2000" i="1" dirty="0"/>
+              <a:t>direct</a:t>
+            </a:r>
+            <a:r>
+              <a:rPr lang="en-GB" sz="2000" dirty="0"/>
+              <a:t>, </a:t>
+            </a:r>
+            <a:r>
+              <a:rPr lang="en-GB" sz="2000" i="1" dirty="0"/>
+              <a:t>indirect</a:t>
+            </a:r>
+            <a:r>
+              <a:rPr lang="en-GB" sz="2000" dirty="0"/>
+              <a:t> or </a:t>
+            </a:r>
+            <a:r>
+              <a:rPr lang="en-GB" sz="2000" i="1" dirty="0"/>
+              <a:t>community/activism</a:t>
+            </a:r>
+            <a:r>
+              <a:rPr lang="en-GB" sz="2000" dirty="0"/>
+              <a:t>.</a:t>
             </a:r>
           </a:p>
         </p:txBody>
@@ -26624,13 +26183,13 @@
           <p:nvPr>
             <p:extLst>
               <p:ext uri="{D42A27DB-BD31-4B8C-83A1-F6EECF244321}">
-                <p14:modId xmlns:p14="http://schemas.microsoft.com/office/powerpoint/2010/main" val="4020271865"/>
+                <p14:modId xmlns:p14="http://schemas.microsoft.com/office/powerpoint/2010/main" val="1606807679"/>
               </p:ext>
             </p:extLst>
           </p:nvPr>
         </p:nvGraphicFramePr>
         <p:xfrm>
-          <a:off x="1172935" y="3801979"/>
+          <a:off x="1054183" y="3579618"/>
           <a:ext cx="9846130" cy="2690896"/>
         </p:xfrm>
         <a:graphic>
@@ -26674,7 +26233,7 @@
           <p:cNvPr id="2" name="Title 1">
             <a:extLst>
               <a:ext uri="{FF2B5EF4-FFF2-40B4-BE49-F238E27FC236}">
-                <a16:creationId xmlns:a16="http://schemas.microsoft.com/office/drawing/2014/main" id="{D9C50214-CBA8-141A-DA81-9CCF2265F6FA}"/>
+                <a16:creationId xmlns:a16="http://schemas.microsoft.com/office/drawing/2014/main" id="{B070A525-E0EB-3A4D-5645-42A59C68DD09}"/>
               </a:ext>
             </a:extLst>
           </p:cNvPr>
@@ -26691,18 +26250,24 @@
           <a:lstStyle/>
           <a:p>
             <a:r>
-              <a:rPr lang="en-GB" dirty="0"/>
-              <a:t>2. Planning projects</a:t>
+              <a:rPr lang="en-GB" dirty="0">
+                <a:solidFill>
+                  <a:schemeClr val="accent3">
+                    <a:lumMod val="75000"/>
+                  </a:schemeClr>
+                </a:solidFill>
+              </a:rPr>
+              <a:t>Solution</a:t>
             </a:r>
           </a:p>
         </p:txBody>
       </p:sp>
       <p:sp>
         <p:nvSpPr>
-          <p:cNvPr id="3" name="Text Placeholder 2">
+          <p:cNvPr id="3" name="Content Placeholder 2">
             <a:extLst>
               <a:ext uri="{FF2B5EF4-FFF2-40B4-BE49-F238E27FC236}">
-                <a16:creationId xmlns:a16="http://schemas.microsoft.com/office/drawing/2014/main" id="{D5A6563A-1BDA-E023-25EC-5C9C82E30EEB}"/>
+                <a16:creationId xmlns:a16="http://schemas.microsoft.com/office/drawing/2014/main" id="{6D5A02FB-F45D-456B-1587-DC518C498D40}"/>
               </a:ext>
             </a:extLst>
           </p:cNvPr>
@@ -26710,22 +26275,66 @@
             <a:spLocks noGrp="1"/>
           </p:cNvSpPr>
           <p:nvPr>
-            <p:ph type="body" idx="1"/>
+            <p:ph idx="1"/>
           </p:nvPr>
         </p:nvSpPr>
         <p:spPr/>
         <p:txBody>
-          <a:bodyPr/>
+          <a:bodyPr>
+            <a:normAutofit fontScale="92500" lnSpcReduction="20000"/>
+          </a:bodyPr>
           <a:lstStyle/>
           <a:p>
-            <a:endParaRPr lang="en-GB"/>
+            <a:pPr marL="0" indent="0">
+              <a:buNone/>
+            </a:pPr>
+            <a:r>
+              <a:rPr lang="en-GB" dirty="0"/>
+              <a:t>Your project overview should clearly state what the project/activity aims to achieve. Your positive environmental impacts might include:</a:t>
+            </a:r>
+          </a:p>
+          <a:p>
+            <a:pPr marL="0" indent="0">
+              <a:buNone/>
+            </a:pPr>
+            <a:endParaRPr lang="en-GB" dirty="0"/>
+          </a:p>
+          <a:p>
+            <a:r>
+              <a:rPr lang="en-GB" dirty="0"/>
+              <a:t>Quantitative measures (e.g., "This project will reduce energy consumption in X process by Y%")</a:t>
+            </a:r>
+          </a:p>
+          <a:p>
+            <a:r>
+              <a:rPr lang="en-GB" dirty="0"/>
+              <a:t>Qualitative measures (e.g., "This project will enable better understanding of climate patterns")</a:t>
+            </a:r>
+          </a:p>
+          <a:p>
+            <a:r>
+              <a:rPr lang="en-GB" dirty="0"/>
+              <a:t>Direct impacts (e.g., reduced emissions from the project itself)</a:t>
+            </a:r>
+          </a:p>
+          <a:p>
+            <a:r>
+              <a:rPr lang="en-GB" dirty="0"/>
+              <a:t>Indirect impacts (e.g., enabling others to reduce their environmental footprint)</a:t>
+            </a:r>
+          </a:p>
+          <a:p>
+            <a:r>
+              <a:rPr lang="en-GB" dirty="0"/>
+              <a:t>Community/activism impacts (e.g. enabling change and normalising action)</a:t>
+            </a:r>
           </a:p>
         </p:txBody>
       </p:sp>
     </p:spTree>
     <p:extLst>
       <p:ext uri="{BB962C8B-B14F-4D97-AF65-F5344CB8AC3E}">
-        <p14:creationId xmlns:p14="http://schemas.microsoft.com/office/powerpoint/2010/main" val="4184960636"/>
+        <p14:creationId xmlns:p14="http://schemas.microsoft.com/office/powerpoint/2010/main" val="2135178806"/>
       </p:ext>
     </p:extLst>
   </p:cSld>
@@ -26757,7 +26366,7 @@
           <p:cNvPr id="2" name="Title 1">
             <a:extLst>
               <a:ext uri="{FF2B5EF4-FFF2-40B4-BE49-F238E27FC236}">
-                <a16:creationId xmlns:a16="http://schemas.microsoft.com/office/drawing/2014/main" id="{2D83EF74-FBA6-F104-45D2-3277B29A1BD9}"/>
+                <a16:creationId xmlns:a16="http://schemas.microsoft.com/office/drawing/2014/main" id="{D9C50214-CBA8-141A-DA81-9CCF2265F6FA}"/>
               </a:ext>
             </a:extLst>
           </p:cNvPr>
@@ -26775,81 +26384,40 @@
           <a:p>
             <a:r>
               <a:rPr lang="en-GB" dirty="0"/>
-              <a:t>Planning: points to consider</a:t>
+              <a:t>2. Planning projects</a:t>
             </a:r>
           </a:p>
         </p:txBody>
       </p:sp>
-      <p:graphicFrame>
-        <p:nvGraphicFramePr>
-          <p:cNvPr id="6" name="Content Placeholder 5">
+      <p:sp>
+        <p:nvSpPr>
+          <p:cNvPr id="3" name="Text Placeholder 2">
             <a:extLst>
               <a:ext uri="{FF2B5EF4-FFF2-40B4-BE49-F238E27FC236}">
-                <a16:creationId xmlns:a16="http://schemas.microsoft.com/office/drawing/2014/main" id="{29E5274F-8188-4662-5A12-AC3FC5FC9FB4}"/>
+                <a16:creationId xmlns:a16="http://schemas.microsoft.com/office/drawing/2014/main" id="{D5A6563A-1BDA-E023-25EC-5C9C82E30EEB}"/>
               </a:ext>
             </a:extLst>
           </p:cNvPr>
-          <p:cNvGraphicFramePr>
-            <a:graphicFrameLocks noGrp="1"/>
-          </p:cNvGraphicFramePr>
+          <p:cNvSpPr>
+            <a:spLocks noGrp="1"/>
+          </p:cNvSpPr>
           <p:nvPr>
-            <p:ph idx="1"/>
-            <p:extLst>
-              <p:ext uri="{D42A27DB-BD31-4B8C-83A1-F6EECF244321}">
-                <p14:modId xmlns:p14="http://schemas.microsoft.com/office/powerpoint/2010/main" val="1789848179"/>
-              </p:ext>
-            </p:extLst>
+            <p:ph type="body" idx="1"/>
           </p:nvPr>
-        </p:nvGraphicFramePr>
-        <p:xfrm>
-          <a:off x="838200" y="2646948"/>
-          <a:ext cx="10515600" cy="3850858"/>
-        </p:xfrm>
-        <a:graphic>
-          <a:graphicData uri="http://schemas.openxmlformats.org/drawingml/2006/diagram">
-            <dgm:relIds xmlns:dgm="http://schemas.openxmlformats.org/drawingml/2006/diagram" xmlns:r="http://schemas.openxmlformats.org/officeDocument/2006/relationships" r:dm="rId2" r:lo="rId3" r:qs="rId4" r:cs="rId5"/>
-          </a:graphicData>
-        </a:graphic>
-      </p:graphicFrame>
-      <p:sp>
-        <p:nvSpPr>
-          <p:cNvPr id="7" name="TextBox 6">
-            <a:extLst>
-              <a:ext uri="{FF2B5EF4-FFF2-40B4-BE49-F238E27FC236}">
-                <a16:creationId xmlns:a16="http://schemas.microsoft.com/office/drawing/2014/main" id="{10850F01-805C-AB1A-A4A8-01D1C15C30CE}"/>
-              </a:ext>
-            </a:extLst>
-          </p:cNvPr>
-          <p:cNvSpPr txBox="1"/>
-          <p:nvPr/>
         </p:nvSpPr>
-        <p:spPr>
-          <a:xfrm>
-            <a:off x="838200" y="1474526"/>
-            <a:ext cx="10515600" cy="1015663"/>
-          </a:xfrm>
-          <a:prstGeom prst="rect">
-            <a:avLst/>
-          </a:prstGeom>
-          <a:noFill/>
-        </p:spPr>
+        <p:spPr/>
         <p:txBody>
-          <a:bodyPr wrap="square" rtlCol="0">
-            <a:spAutoFit/>
-          </a:bodyPr>
+          <a:bodyPr/>
           <a:lstStyle/>
           <a:p>
-            <a:r>
-              <a:rPr lang="en-GB" sz="2000" i="1" dirty="0"/>
-              <a:t>Planning the project with environmental sustainability in mind is typically the time when you can have the largest impact. Planning to run the project in a responsible way almost always makes the project more impactful and robust from a non-environmental standpoint too. </a:t>
-            </a:r>
+            <a:endParaRPr lang="en-GB"/>
           </a:p>
         </p:txBody>
       </p:sp>
     </p:spTree>
     <p:extLst>
       <p:ext uri="{BB962C8B-B14F-4D97-AF65-F5344CB8AC3E}">
-        <p14:creationId xmlns:p14="http://schemas.microsoft.com/office/powerpoint/2010/main" val="2908258310"/>
+        <p14:creationId xmlns:p14="http://schemas.microsoft.com/office/powerpoint/2010/main" val="4184960636"/>
       </p:ext>
     </p:extLst>
   </p:cSld>
